--- a/templates/PPT_template/Smart_AI_Template.pptx
+++ b/templates/PPT_template/Smart_AI_Template.pptx
@@ -3112,16 +3112,16 @@
       <p:grpSpPr/>
       <p:sp>
         <p:nvSpPr>
-          <p:cNvPr id="2" name="Oval 1"/>
+          <p:cNvPr id="2" name="Rectangle 1"/>
           <p:cNvSpPr/>
           <p:nvPr/>
         </p:nvSpPr>
         <p:spPr>
           <a:xfrm>
-            <a:off x="8595360" y="-1463040"/>
-            <a:ext cx="4572000" cy="4572000"/>
-          </a:xfrm>
-          <a:prstGeom prst="ellipse">
+            <a:off x="0" y="0"/>
+            <a:ext cx="2377440" cy="6858000"/>
+          </a:xfrm>
+          <a:prstGeom prst="rect">
             <a:avLst/>
           </a:prstGeom>
           <a:solidFill>
@@ -3156,45 +3156,36 @@
       </p:sp>
       <p:sp>
         <p:nvSpPr>
-          <p:cNvPr id="3" name="Rectangle 2"/>
-          <p:cNvSpPr/>
-          <p:nvPr/>
-        </p:nvSpPr>
-        <p:spPr>
-          <a:xfrm>
-            <a:off x="0" y="0"/>
-            <a:ext cx="146304" cy="6858000"/>
-          </a:xfrm>
-          <a:prstGeom prst="rect">
-            <a:avLst/>
-          </a:prstGeom>
-          <a:solidFill>
-            <a:srgbClr val="E2DBFF"/>
-          </a:solidFill>
-          <a:ln>
-            <a:noFill/>
-          </a:ln>
-          <a:effectLst/>
-        </p:spPr>
-        <p:style>
-          <a:lnRef idx="1">
-            <a:schemeClr val="accent1"/>
-          </a:lnRef>
-          <a:fillRef idx="3">
-            <a:schemeClr val="accent1"/>
-          </a:fillRef>
-          <a:effectRef idx="2">
-            <a:schemeClr val="accent1"/>
-          </a:effectRef>
-          <a:fontRef idx="minor">
-            <a:schemeClr val="lt1"/>
-          </a:fontRef>
-        </p:style>
-        <p:txBody>
-          <a:bodyPr rtlCol="0" anchor="ctr"/>
-          <a:lstStyle/>
-          <a:p>
-            <a:pPr algn="ctr"/>
+          <p:cNvPr id="3" name="TextBox 2"/>
+          <p:cNvSpPr txBox="1"/>
+          <p:nvPr/>
+        </p:nvSpPr>
+        <p:spPr>
+          <a:xfrm>
+            <a:off x="868680" y="6309360"/>
+            <a:ext cx="3657600" cy="365760"/>
+          </a:xfrm>
+          <a:prstGeom prst="rect">
+            <a:avLst/>
+          </a:prstGeom>
+          <a:noFill/>
+        </p:spPr>
+        <p:txBody>
+          <a:bodyPr wrap="none">
+            <a:spAutoFit/>
+          </a:bodyPr>
+          <a:lstStyle/>
+          <a:p>
+            <a:pPr algn="l"/>
+            <a:r>
+              <a:rPr sz="1000" b="0">
+                <a:solidFill>
+                  <a:srgbClr val="FFFFFF"/>
+                </a:solidFill>
+                <a:latin typeface="Microsoft YaHei"/>
+              </a:rPr>
+              <a:t>LESSONFORGE 微课</a:t>
+            </a:r>
           </a:p>
         </p:txBody>
       </p:sp>
@@ -3206,29 +3197,29 @@
         </p:nvSpPr>
         <p:spPr>
           <a:xfrm>
-            <a:off x="868680" y="6263640"/>
-            <a:ext cx="5486400" cy="365760"/>
-          </a:xfrm>
-          <a:prstGeom prst="rect">
-            <a:avLst/>
-          </a:prstGeom>
-          <a:noFill/>
-        </p:spPr>
-        <p:txBody>
-          <a:bodyPr wrap="none">
-            <a:spAutoFit/>
-          </a:bodyPr>
-          <a:lstStyle/>
-          <a:p>
-            <a:pPr algn="l"/>
-            <a:r>
-              <a:rPr sz="1000" b="0">
+            <a:off x="2926080" y="2286000"/>
+            <a:ext cx="8595360" cy="1554480"/>
+          </a:xfrm>
+          <a:prstGeom prst="rect">
+            <a:avLst/>
+          </a:prstGeom>
+          <a:noFill/>
+        </p:spPr>
+        <p:txBody>
+          <a:bodyPr wrap="square" lIns="18288" rIns="18288" tIns="9144" bIns="9144" anchor="ctr">
+            <a:spAutoFit/>
+          </a:bodyPr>
+          <a:lstStyle/>
+          <a:p>
+            <a:pPr algn="l"/>
+            <a:r>
+              <a:rPr sz="4200" b="1" i="0">
                 <a:solidFill>
                   <a:srgbClr val="FFFFFF"/>
                 </a:solidFill>
                 <a:latin typeface="Microsoft YaHei"/>
               </a:rPr>
-              <a:t>LESSONFORGE 微课</a:t>
+              <a:t/>
             </a:r>
           </a:p>
         </p:txBody>
@@ -3241,8 +3232,8 @@
         </p:nvSpPr>
         <p:spPr>
           <a:xfrm>
-            <a:off x="914400" y="1828800"/>
-            <a:ext cx="10332720" cy="1737360"/>
+            <a:off x="2926080" y="4023360"/>
+            <a:ext cx="8595360" cy="640080"/>
           </a:xfrm>
           <a:prstGeom prst="rect">
             <a:avLst/>
@@ -3257,44 +3248,9 @@
           <a:p>
             <a:pPr algn="l"/>
             <a:r>
-              <a:rPr sz="4000" b="1" i="0">
-                <a:solidFill>
-                  <a:srgbClr val="FFFFFF"/>
-                </a:solidFill>
-                <a:latin typeface="Microsoft YaHei"/>
-              </a:rPr>
-              <a:t/>
-            </a:r>
-          </a:p>
-        </p:txBody>
-      </p:sp>
-      <p:sp>
-        <p:nvSpPr>
-          <p:cNvPr id="6" name="TextBox 5"/>
-          <p:cNvSpPr txBox="1"/>
-          <p:nvPr/>
-        </p:nvSpPr>
-        <p:spPr>
-          <a:xfrm>
-            <a:off x="914400" y="3749039"/>
-            <a:ext cx="10332720" cy="822960"/>
-          </a:xfrm>
-          <a:prstGeom prst="rect">
-            <a:avLst/>
-          </a:prstGeom>
-          <a:noFill/>
-        </p:spPr>
-        <p:txBody>
-          <a:bodyPr wrap="square" lIns="18288" rIns="18288" tIns="9144" bIns="9144" anchor="ctr">
-            <a:spAutoFit/>
-          </a:bodyPr>
-          <a:lstStyle/>
-          <a:p>
-            <a:pPr algn="l"/>
-            <a:r>
               <a:rPr sz="2000" b="0" i="0">
                 <a:solidFill>
-                  <a:srgbClr val="FFFFFF"/>
+                  <a:srgbClr val="E2DBFF"/>
                 </a:solidFill>
                 <a:latin typeface="Microsoft YaHei"/>
               </a:rPr>
@@ -3338,7 +3294,7 @@
         <p:spPr>
           <a:xfrm>
             <a:off x="0" y="0"/>
-            <a:ext cx="118872" cy="6858000"/>
+            <a:ext cx="1554480" cy="6858000"/>
           </a:xfrm>
           <a:prstGeom prst="rect">
             <a:avLst/>
@@ -3375,119 +3331,14 @@
       </p:sp>
       <p:sp>
         <p:nvSpPr>
-          <p:cNvPr id="3" name="TextBox 2"/>
-          <p:cNvSpPr txBox="1"/>
-          <p:nvPr/>
-        </p:nvSpPr>
-        <p:spPr>
-          <a:xfrm>
-            <a:off x="457200" y="6419088"/>
-            <a:ext cx="3657600" cy="274320"/>
-          </a:xfrm>
-          <a:prstGeom prst="rect">
-            <a:avLst/>
-          </a:prstGeom>
-          <a:noFill/>
-        </p:spPr>
-        <p:txBody>
-          <a:bodyPr wrap="none">
-            <a:spAutoFit/>
-          </a:bodyPr>
-          <a:lstStyle/>
-          <a:p>
-            <a:pPr algn="l"/>
-            <a:r>
-              <a:rPr sz="900" b="0">
-                <a:solidFill>
-                  <a:srgbClr val="6E6A8A"/>
-                </a:solidFill>
-                <a:latin typeface="Microsoft YaHei"/>
-              </a:rPr>
-              <a:t>LESSONFORGE 微课</a:t>
-            </a:r>
-          </a:p>
-        </p:txBody>
-      </p:sp>
-      <p:sp>
-        <p:nvSpPr>
-          <p:cNvPr id="4" name="TextBox 3"/>
-          <p:cNvSpPr txBox="1"/>
-          <p:nvPr/>
-        </p:nvSpPr>
-        <p:spPr>
-          <a:xfrm>
-            <a:off x="10607040" y="6419088"/>
-            <a:ext cx="1097280" cy="274320"/>
-          </a:xfrm>
-          <a:prstGeom prst="rect">
-            <a:avLst/>
-          </a:prstGeom>
-          <a:noFill/>
-        </p:spPr>
-        <p:txBody>
-          <a:bodyPr wrap="none">
-            <a:spAutoFit/>
-          </a:bodyPr>
-          <a:lstStyle/>
-          <a:p>
-            <a:pPr algn="r"/>
-            <a:r>
-              <a:rPr sz="1000" b="1">
-                <a:solidFill>
-                  <a:srgbClr val="6E6A8A"/>
-                </a:solidFill>
-                <a:latin typeface="Microsoft YaHei"/>
-              </a:rPr>
-              <a:t>10</a:t>
-            </a:r>
-          </a:p>
-        </p:txBody>
-      </p:sp>
-      <p:sp>
-        <p:nvSpPr>
-          <p:cNvPr id="5" name="TextBox 4"/>
-          <p:cNvSpPr txBox="1"/>
-          <p:nvPr/>
-        </p:nvSpPr>
-        <p:spPr>
-          <a:xfrm>
-            <a:off x="548640" y="457200"/>
-            <a:ext cx="11064240" cy="777240"/>
-          </a:xfrm>
-          <a:prstGeom prst="rect">
-            <a:avLst/>
-          </a:prstGeom>
-          <a:noFill/>
-        </p:spPr>
-        <p:txBody>
-          <a:bodyPr wrap="square" lIns="18288" rIns="18288" tIns="9144" bIns="9144" anchor="ctr">
-            <a:spAutoFit/>
-          </a:bodyPr>
-          <a:lstStyle/>
-          <a:p>
-            <a:pPr algn="l"/>
-            <a:r>
-              <a:rPr sz="2800" b="1" i="0">
-                <a:solidFill>
-                  <a:srgbClr val="5B3DF5"/>
-                </a:solidFill>
-                <a:latin typeface="Microsoft YaHei"/>
-              </a:rPr>
-              <a:t/>
-            </a:r>
-          </a:p>
-        </p:txBody>
-      </p:sp>
-      <p:sp>
-        <p:nvSpPr>
-          <p:cNvPr id="6" name="Rectangle 5"/>
+          <p:cNvPr id="3" name="Rectangle 2"/>
           <p:cNvSpPr/>
           <p:nvPr/>
         </p:nvSpPr>
         <p:spPr>
           <a:xfrm>
-            <a:off x="566928" y="1298448"/>
-            <a:ext cx="1234440" cy="82296"/>
+            <a:off x="1554480" y="0"/>
+            <a:ext cx="64008" cy="6858000"/>
           </a:xfrm>
           <a:prstGeom prst="rect">
             <a:avLst/>
@@ -3524,14 +3375,84 @@
       </p:sp>
       <p:sp>
         <p:nvSpPr>
-          <p:cNvPr id="7" name="TextBox 6"/>
-          <p:cNvSpPr txBox="1"/>
-          <p:nvPr/>
-        </p:nvSpPr>
-        <p:spPr>
-          <a:xfrm>
-            <a:off x="594360" y="1691640"/>
-            <a:ext cx="2606040" cy="1051560"/>
+          <p:cNvPr id="4" name="TextBox 3"/>
+          <p:cNvSpPr txBox="1"/>
+          <p:nvPr/>
+        </p:nvSpPr>
+        <p:spPr>
+          <a:xfrm>
+            <a:off x="411480" y="6419088"/>
+            <a:ext cx="1097280" cy="274320"/>
+          </a:xfrm>
+          <a:prstGeom prst="rect">
+            <a:avLst/>
+          </a:prstGeom>
+          <a:noFill/>
+        </p:spPr>
+        <p:txBody>
+          <a:bodyPr wrap="none">
+            <a:spAutoFit/>
+          </a:bodyPr>
+          <a:lstStyle/>
+          <a:p>
+            <a:pPr algn="l"/>
+            <a:r>
+              <a:rPr sz="900" b="0">
+                <a:solidFill>
+                  <a:srgbClr val="FFFFFF"/>
+                </a:solidFill>
+                <a:latin typeface="Microsoft YaHei"/>
+              </a:rPr>
+              <a:t>LESSONFORGE 微课</a:t>
+            </a:r>
+          </a:p>
+        </p:txBody>
+      </p:sp>
+      <p:sp>
+        <p:nvSpPr>
+          <p:cNvPr id="5" name="TextBox 4"/>
+          <p:cNvSpPr txBox="1"/>
+          <p:nvPr/>
+        </p:nvSpPr>
+        <p:spPr>
+          <a:xfrm>
+            <a:off x="10607040" y="6419088"/>
+            <a:ext cx="1097280" cy="274320"/>
+          </a:xfrm>
+          <a:prstGeom prst="rect">
+            <a:avLst/>
+          </a:prstGeom>
+          <a:noFill/>
+        </p:spPr>
+        <p:txBody>
+          <a:bodyPr wrap="none">
+            <a:spAutoFit/>
+          </a:bodyPr>
+          <a:lstStyle/>
+          <a:p>
+            <a:pPr algn="r"/>
+            <a:r>
+              <a:rPr sz="1000" b="1">
+                <a:solidFill>
+                  <a:srgbClr val="6E6A8A"/>
+                </a:solidFill>
+                <a:latin typeface="Microsoft YaHei"/>
+              </a:rPr>
+              <a:t>10</a:t>
+            </a:r>
+          </a:p>
+        </p:txBody>
+      </p:sp>
+      <p:sp>
+        <p:nvSpPr>
+          <p:cNvPr id="6" name="TextBox 5"/>
+          <p:cNvSpPr txBox="1"/>
+          <p:nvPr/>
+        </p:nvSpPr>
+        <p:spPr>
+          <a:xfrm>
+            <a:off x="1828800" y="502920"/>
+            <a:ext cx="9966960" cy="777240"/>
           </a:xfrm>
           <a:prstGeom prst="rect">
             <a:avLst/>
@@ -3546,6 +3467,85 @@
           <a:p>
             <a:pPr algn="l"/>
             <a:r>
+              <a:rPr sz="2800" b="1" i="0">
+                <a:solidFill>
+                  <a:srgbClr val="5B3DF5"/>
+                </a:solidFill>
+                <a:latin typeface="Microsoft YaHei"/>
+              </a:rPr>
+              <a:t/>
+            </a:r>
+          </a:p>
+        </p:txBody>
+      </p:sp>
+      <p:sp>
+        <p:nvSpPr>
+          <p:cNvPr id="7" name="Rectangle 6"/>
+          <p:cNvSpPr/>
+          <p:nvPr/>
+        </p:nvSpPr>
+        <p:spPr>
+          <a:xfrm>
+            <a:off x="1856231" y="1335024"/>
+            <a:ext cx="1234440" cy="82296"/>
+          </a:xfrm>
+          <a:prstGeom prst="rect">
+            <a:avLst/>
+          </a:prstGeom>
+          <a:solidFill>
+            <a:srgbClr val="5B3DF5"/>
+          </a:solidFill>
+          <a:ln>
+            <a:noFill/>
+          </a:ln>
+          <a:effectLst/>
+        </p:spPr>
+        <p:style>
+          <a:lnRef idx="1">
+            <a:schemeClr val="accent1"/>
+          </a:lnRef>
+          <a:fillRef idx="3">
+            <a:schemeClr val="accent1"/>
+          </a:fillRef>
+          <a:effectRef idx="2">
+            <a:schemeClr val="accent1"/>
+          </a:effectRef>
+          <a:fontRef idx="minor">
+            <a:schemeClr val="lt1"/>
+          </a:fontRef>
+        </p:style>
+        <p:txBody>
+          <a:bodyPr rtlCol="0" anchor="ctr"/>
+          <a:lstStyle/>
+          <a:p>
+            <a:pPr algn="ctr"/>
+          </a:p>
+        </p:txBody>
+      </p:sp>
+      <p:sp>
+        <p:nvSpPr>
+          <p:cNvPr id="8" name="TextBox 7"/>
+          <p:cNvSpPr txBox="1"/>
+          <p:nvPr/>
+        </p:nvSpPr>
+        <p:spPr>
+          <a:xfrm>
+            <a:off x="1828800" y="1691640"/>
+            <a:ext cx="2468880" cy="1005840"/>
+          </a:xfrm>
+          <a:prstGeom prst="rect">
+            <a:avLst/>
+          </a:prstGeom>
+          <a:noFill/>
+        </p:spPr>
+        <p:txBody>
+          <a:bodyPr wrap="square" lIns="18288" rIns="18288" tIns="9144" bIns="9144" anchor="ctr">
+            <a:spAutoFit/>
+          </a:bodyPr>
+          <a:lstStyle/>
+          <a:p>
+            <a:pPr algn="l"/>
+            <a:r>
               <a:rPr sz="1600" b="1" i="0">
                 <a:solidFill>
                   <a:srgbClr val="1B1830"/>
@@ -3559,14 +3559,14 @@
       </p:sp>
       <p:sp>
         <p:nvSpPr>
-          <p:cNvPr id="8" name="TextBox 7"/>
-          <p:cNvSpPr txBox="1"/>
-          <p:nvPr/>
-        </p:nvSpPr>
-        <p:spPr>
-          <a:xfrm>
-            <a:off x="3429000" y="1691640"/>
-            <a:ext cx="2606040" cy="1051560"/>
+          <p:cNvPr id="9" name="TextBox 8"/>
+          <p:cNvSpPr txBox="1"/>
+          <p:nvPr/>
+        </p:nvSpPr>
+        <p:spPr>
+          <a:xfrm>
+            <a:off x="6949440" y="1691640"/>
+            <a:ext cx="2468880" cy="1005840"/>
           </a:xfrm>
           <a:prstGeom prst="rect">
             <a:avLst/>
@@ -3594,14 +3594,14 @@
       </p:sp>
       <p:sp>
         <p:nvSpPr>
-          <p:cNvPr id="9" name="TextBox 8"/>
-          <p:cNvSpPr txBox="1"/>
-          <p:nvPr/>
-        </p:nvSpPr>
-        <p:spPr>
-          <a:xfrm>
-            <a:off x="6263640" y="1691640"/>
-            <a:ext cx="2606040" cy="1051560"/>
+          <p:cNvPr id="10" name="TextBox 9"/>
+          <p:cNvSpPr txBox="1"/>
+          <p:nvPr/>
+        </p:nvSpPr>
+        <p:spPr>
+          <a:xfrm>
+            <a:off x="12070080" y="1691640"/>
+            <a:ext cx="2468880" cy="1005840"/>
           </a:xfrm>
           <a:prstGeom prst="rect">
             <a:avLst/>
@@ -3629,14 +3629,14 @@
       </p:sp>
       <p:sp>
         <p:nvSpPr>
-          <p:cNvPr id="10" name="TextBox 9"/>
-          <p:cNvSpPr txBox="1"/>
-          <p:nvPr/>
-        </p:nvSpPr>
-        <p:spPr>
-          <a:xfrm>
-            <a:off x="9098280" y="1691640"/>
-            <a:ext cx="2606040" cy="1051560"/>
+          <p:cNvPr id="11" name="TextBox 10"/>
+          <p:cNvSpPr txBox="1"/>
+          <p:nvPr/>
+        </p:nvSpPr>
+        <p:spPr>
+          <a:xfrm>
+            <a:off x="17190719" y="1691640"/>
+            <a:ext cx="2468880" cy="1005840"/>
           </a:xfrm>
           <a:prstGeom prst="rect">
             <a:avLst/>
@@ -3664,13 +3664,13 @@
       </p:sp>
       <p:sp>
         <p:nvSpPr>
-          <p:cNvPr id="11" name="TextBox 10"/>
-          <p:cNvSpPr txBox="1"/>
-          <p:nvPr/>
-        </p:nvSpPr>
-        <p:spPr>
-          <a:xfrm>
-            <a:off x="594360" y="3108960"/>
+          <p:cNvPr id="12" name="TextBox 11"/>
+          <p:cNvSpPr txBox="1"/>
+          <p:nvPr/>
+        </p:nvSpPr>
+        <p:spPr>
+          <a:xfrm>
+            <a:off x="1828800" y="3063240"/>
             <a:ext cx="2743200" cy="457200"/>
           </a:xfrm>
           <a:prstGeom prst="rect">
@@ -3699,14 +3699,14 @@
       </p:sp>
       <p:sp>
         <p:nvSpPr>
-          <p:cNvPr id="12" name="TextBox 11"/>
-          <p:cNvSpPr txBox="1"/>
-          <p:nvPr/>
-        </p:nvSpPr>
-        <p:spPr>
-          <a:xfrm>
-            <a:off x="594360" y="3657600"/>
-            <a:ext cx="10972800" cy="1097280"/>
+          <p:cNvPr id="13" name="TextBox 12"/>
+          <p:cNvSpPr txBox="1"/>
+          <p:nvPr/>
+        </p:nvSpPr>
+        <p:spPr>
+          <a:xfrm>
+            <a:off x="1828800" y="3611880"/>
+            <a:ext cx="9966960" cy="1097280"/>
           </a:xfrm>
           <a:prstGeom prst="rect">
             <a:avLst/>
@@ -3767,7 +3767,7 @@
         <p:spPr>
           <a:xfrm>
             <a:off x="0" y="0"/>
-            <a:ext cx="118872" cy="6858000"/>
+            <a:ext cx="1554480" cy="6858000"/>
           </a:xfrm>
           <a:prstGeom prst="rect">
             <a:avLst/>
@@ -3804,119 +3804,14 @@
       </p:sp>
       <p:sp>
         <p:nvSpPr>
-          <p:cNvPr id="3" name="TextBox 2"/>
-          <p:cNvSpPr txBox="1"/>
-          <p:nvPr/>
-        </p:nvSpPr>
-        <p:spPr>
-          <a:xfrm>
-            <a:off x="457200" y="6419088"/>
-            <a:ext cx="3657600" cy="274320"/>
-          </a:xfrm>
-          <a:prstGeom prst="rect">
-            <a:avLst/>
-          </a:prstGeom>
-          <a:noFill/>
-        </p:spPr>
-        <p:txBody>
-          <a:bodyPr wrap="none">
-            <a:spAutoFit/>
-          </a:bodyPr>
-          <a:lstStyle/>
-          <a:p>
-            <a:pPr algn="l"/>
-            <a:r>
-              <a:rPr sz="900" b="0">
-                <a:solidFill>
-                  <a:srgbClr val="6E6A8A"/>
-                </a:solidFill>
-                <a:latin typeface="Microsoft YaHei"/>
-              </a:rPr>
-              <a:t>LESSONFORGE 微课</a:t>
-            </a:r>
-          </a:p>
-        </p:txBody>
-      </p:sp>
-      <p:sp>
-        <p:nvSpPr>
-          <p:cNvPr id="4" name="TextBox 3"/>
-          <p:cNvSpPr txBox="1"/>
-          <p:nvPr/>
-        </p:nvSpPr>
-        <p:spPr>
-          <a:xfrm>
-            <a:off x="10607040" y="6419088"/>
-            <a:ext cx="1097280" cy="274320"/>
-          </a:xfrm>
-          <a:prstGeom prst="rect">
-            <a:avLst/>
-          </a:prstGeom>
-          <a:noFill/>
-        </p:spPr>
-        <p:txBody>
-          <a:bodyPr wrap="none">
-            <a:spAutoFit/>
-          </a:bodyPr>
-          <a:lstStyle/>
-          <a:p>
-            <a:pPr algn="r"/>
-            <a:r>
-              <a:rPr sz="1000" b="1">
-                <a:solidFill>
-                  <a:srgbClr val="6E6A8A"/>
-                </a:solidFill>
-                <a:latin typeface="Microsoft YaHei"/>
-              </a:rPr>
-              <a:t>11</a:t>
-            </a:r>
-          </a:p>
-        </p:txBody>
-      </p:sp>
-      <p:sp>
-        <p:nvSpPr>
-          <p:cNvPr id="5" name="TextBox 4"/>
-          <p:cNvSpPr txBox="1"/>
-          <p:nvPr/>
-        </p:nvSpPr>
-        <p:spPr>
-          <a:xfrm>
-            <a:off x="548640" y="457200"/>
-            <a:ext cx="11064240" cy="777240"/>
-          </a:xfrm>
-          <a:prstGeom prst="rect">
-            <a:avLst/>
-          </a:prstGeom>
-          <a:noFill/>
-        </p:spPr>
-        <p:txBody>
-          <a:bodyPr wrap="square" lIns="18288" rIns="18288" tIns="9144" bIns="9144" anchor="ctr">
-            <a:spAutoFit/>
-          </a:bodyPr>
-          <a:lstStyle/>
-          <a:p>
-            <a:pPr algn="l"/>
-            <a:r>
-              <a:rPr sz="2800" b="1" i="0">
-                <a:solidFill>
-                  <a:srgbClr val="5B3DF5"/>
-                </a:solidFill>
-                <a:latin typeface="Microsoft YaHei"/>
-              </a:rPr>
-              <a:t/>
-            </a:r>
-          </a:p>
-        </p:txBody>
-      </p:sp>
-      <p:sp>
-        <p:nvSpPr>
-          <p:cNvPr id="6" name="Rectangle 5"/>
+          <p:cNvPr id="3" name="Rectangle 2"/>
           <p:cNvSpPr/>
           <p:nvPr/>
         </p:nvSpPr>
         <p:spPr>
           <a:xfrm>
-            <a:off x="566928" y="1298448"/>
-            <a:ext cx="1234440" cy="82296"/>
+            <a:off x="1554480" y="0"/>
+            <a:ext cx="64008" cy="6858000"/>
           </a:xfrm>
           <a:prstGeom prst="rect">
             <a:avLst/>
@@ -3953,14 +3848,84 @@
       </p:sp>
       <p:sp>
         <p:nvSpPr>
-          <p:cNvPr id="7" name="TextBox 6"/>
-          <p:cNvSpPr txBox="1"/>
-          <p:nvPr/>
-        </p:nvSpPr>
-        <p:spPr>
-          <a:xfrm>
-            <a:off x="594360" y="1783080"/>
-            <a:ext cx="10972800" cy="822960"/>
+          <p:cNvPr id="4" name="TextBox 3"/>
+          <p:cNvSpPr txBox="1"/>
+          <p:nvPr/>
+        </p:nvSpPr>
+        <p:spPr>
+          <a:xfrm>
+            <a:off x="411480" y="6419088"/>
+            <a:ext cx="1097280" cy="274320"/>
+          </a:xfrm>
+          <a:prstGeom prst="rect">
+            <a:avLst/>
+          </a:prstGeom>
+          <a:noFill/>
+        </p:spPr>
+        <p:txBody>
+          <a:bodyPr wrap="none">
+            <a:spAutoFit/>
+          </a:bodyPr>
+          <a:lstStyle/>
+          <a:p>
+            <a:pPr algn="l"/>
+            <a:r>
+              <a:rPr sz="900" b="0">
+                <a:solidFill>
+                  <a:srgbClr val="FFFFFF"/>
+                </a:solidFill>
+                <a:latin typeface="Microsoft YaHei"/>
+              </a:rPr>
+              <a:t>LESSONFORGE 微课</a:t>
+            </a:r>
+          </a:p>
+        </p:txBody>
+      </p:sp>
+      <p:sp>
+        <p:nvSpPr>
+          <p:cNvPr id="5" name="TextBox 4"/>
+          <p:cNvSpPr txBox="1"/>
+          <p:nvPr/>
+        </p:nvSpPr>
+        <p:spPr>
+          <a:xfrm>
+            <a:off x="10607040" y="6419088"/>
+            <a:ext cx="1097280" cy="274320"/>
+          </a:xfrm>
+          <a:prstGeom prst="rect">
+            <a:avLst/>
+          </a:prstGeom>
+          <a:noFill/>
+        </p:spPr>
+        <p:txBody>
+          <a:bodyPr wrap="none">
+            <a:spAutoFit/>
+          </a:bodyPr>
+          <a:lstStyle/>
+          <a:p>
+            <a:pPr algn="r"/>
+            <a:r>
+              <a:rPr sz="1000" b="1">
+                <a:solidFill>
+                  <a:srgbClr val="6E6A8A"/>
+                </a:solidFill>
+                <a:latin typeface="Microsoft YaHei"/>
+              </a:rPr>
+              <a:t>11</a:t>
+            </a:r>
+          </a:p>
+        </p:txBody>
+      </p:sp>
+      <p:sp>
+        <p:nvSpPr>
+          <p:cNvPr id="6" name="TextBox 5"/>
+          <p:cNvSpPr txBox="1"/>
+          <p:nvPr/>
+        </p:nvSpPr>
+        <p:spPr>
+          <a:xfrm>
+            <a:off x="1828800" y="502920"/>
+            <a:ext cx="9966960" cy="777240"/>
           </a:xfrm>
           <a:prstGeom prst="rect">
             <a:avLst/>
@@ -3975,6 +3940,85 @@
           <a:p>
             <a:pPr algn="l"/>
             <a:r>
+              <a:rPr sz="2800" b="1" i="0">
+                <a:solidFill>
+                  <a:srgbClr val="5B3DF5"/>
+                </a:solidFill>
+                <a:latin typeface="Microsoft YaHei"/>
+              </a:rPr>
+              <a:t/>
+            </a:r>
+          </a:p>
+        </p:txBody>
+      </p:sp>
+      <p:sp>
+        <p:nvSpPr>
+          <p:cNvPr id="7" name="Rectangle 6"/>
+          <p:cNvSpPr/>
+          <p:nvPr/>
+        </p:nvSpPr>
+        <p:spPr>
+          <a:xfrm>
+            <a:off x="1856231" y="1335024"/>
+            <a:ext cx="1234440" cy="82296"/>
+          </a:xfrm>
+          <a:prstGeom prst="rect">
+            <a:avLst/>
+          </a:prstGeom>
+          <a:solidFill>
+            <a:srgbClr val="5B3DF5"/>
+          </a:solidFill>
+          <a:ln>
+            <a:noFill/>
+          </a:ln>
+          <a:effectLst/>
+        </p:spPr>
+        <p:style>
+          <a:lnRef idx="1">
+            <a:schemeClr val="accent1"/>
+          </a:lnRef>
+          <a:fillRef idx="3">
+            <a:schemeClr val="accent1"/>
+          </a:fillRef>
+          <a:effectRef idx="2">
+            <a:schemeClr val="accent1"/>
+          </a:effectRef>
+          <a:fontRef idx="minor">
+            <a:schemeClr val="lt1"/>
+          </a:fontRef>
+        </p:style>
+        <p:txBody>
+          <a:bodyPr rtlCol="0" anchor="ctr"/>
+          <a:lstStyle/>
+          <a:p>
+            <a:pPr algn="ctr"/>
+          </a:p>
+        </p:txBody>
+      </p:sp>
+      <p:sp>
+        <p:nvSpPr>
+          <p:cNvPr id="8" name="TextBox 7"/>
+          <p:cNvSpPr txBox="1"/>
+          <p:nvPr/>
+        </p:nvSpPr>
+        <p:spPr>
+          <a:xfrm>
+            <a:off x="1828800" y="1783080"/>
+            <a:ext cx="9966960" cy="777240"/>
+          </a:xfrm>
+          <a:prstGeom prst="rect">
+            <a:avLst/>
+          </a:prstGeom>
+          <a:noFill/>
+        </p:spPr>
+        <p:txBody>
+          <a:bodyPr wrap="square" lIns="18288" rIns="18288" tIns="9144" bIns="9144" anchor="ctr">
+            <a:spAutoFit/>
+          </a:bodyPr>
+          <a:lstStyle/>
+          <a:p>
+            <a:pPr algn="l"/>
+            <a:r>
               <a:rPr sz="1800" b="1" i="0">
                 <a:solidFill>
                   <a:srgbClr val="5B3DF5"/>
@@ -3988,14 +4032,14 @@
       </p:sp>
       <p:sp>
         <p:nvSpPr>
-          <p:cNvPr id="8" name="TextBox 7"/>
-          <p:cNvSpPr txBox="1"/>
-          <p:nvPr/>
-        </p:nvSpPr>
-        <p:spPr>
-          <a:xfrm>
-            <a:off x="594360" y="2880360"/>
-            <a:ext cx="10972800" cy="777240"/>
+          <p:cNvPr id="9" name="TextBox 8"/>
+          <p:cNvSpPr txBox="1"/>
+          <p:nvPr/>
+        </p:nvSpPr>
+        <p:spPr>
+          <a:xfrm>
+            <a:off x="1828800" y="2834640"/>
+            <a:ext cx="4572000" cy="868680"/>
           </a:xfrm>
           <a:prstGeom prst="rect">
             <a:avLst/>
@@ -4023,14 +4067,14 @@
       </p:sp>
       <p:sp>
         <p:nvSpPr>
-          <p:cNvPr id="9" name="TextBox 8"/>
-          <p:cNvSpPr txBox="1"/>
-          <p:nvPr/>
-        </p:nvSpPr>
-        <p:spPr>
-          <a:xfrm>
-            <a:off x="594360" y="3840480"/>
-            <a:ext cx="10972800" cy="777240"/>
+          <p:cNvPr id="10" name="TextBox 9"/>
+          <p:cNvSpPr txBox="1"/>
+          <p:nvPr/>
+        </p:nvSpPr>
+        <p:spPr>
+          <a:xfrm>
+            <a:off x="7132320" y="2834640"/>
+            <a:ext cx="4572000" cy="868680"/>
           </a:xfrm>
           <a:prstGeom prst="rect">
             <a:avLst/>
@@ -4058,14 +4102,49 @@
       </p:sp>
       <p:sp>
         <p:nvSpPr>
-          <p:cNvPr id="10" name="TextBox 9"/>
-          <p:cNvSpPr txBox="1"/>
-          <p:nvPr/>
-        </p:nvSpPr>
-        <p:spPr>
-          <a:xfrm>
-            <a:off x="594360" y="4800600"/>
-            <a:ext cx="10972800" cy="777240"/>
+          <p:cNvPr id="11" name="TextBox 10"/>
+          <p:cNvSpPr txBox="1"/>
+          <p:nvPr/>
+        </p:nvSpPr>
+        <p:spPr>
+          <a:xfrm>
+            <a:off x="1828800" y="4251960"/>
+            <a:ext cx="4572000" cy="868680"/>
+          </a:xfrm>
+          <a:prstGeom prst="rect">
+            <a:avLst/>
+          </a:prstGeom>
+          <a:noFill/>
+        </p:spPr>
+        <p:txBody>
+          <a:bodyPr wrap="square" lIns="18288" rIns="18288" tIns="9144" bIns="9144" anchor="ctr">
+            <a:spAutoFit/>
+          </a:bodyPr>
+          <a:lstStyle/>
+          <a:p>
+            <a:pPr algn="l"/>
+            <a:r>
+              <a:rPr sz="1600" b="0" i="0">
+                <a:solidFill>
+                  <a:srgbClr val="1B1830"/>
+                </a:solidFill>
+                <a:latin typeface="Microsoft YaHei"/>
+              </a:rPr>
+              <a:t/>
+            </a:r>
+          </a:p>
+        </p:txBody>
+      </p:sp>
+      <p:sp>
+        <p:nvSpPr>
+          <p:cNvPr id="12" name="TextBox 11"/>
+          <p:cNvSpPr txBox="1"/>
+          <p:nvPr/>
+        </p:nvSpPr>
+        <p:spPr>
+          <a:xfrm>
+            <a:off x="7132320" y="4251960"/>
+            <a:ext cx="4572000" cy="868680"/>
           </a:xfrm>
           <a:prstGeom prst="rect">
             <a:avLst/>
@@ -4126,7 +4205,7 @@
         <p:spPr>
           <a:xfrm>
             <a:off x="0" y="0"/>
-            <a:ext cx="118872" cy="6858000"/>
+            <a:ext cx="1554480" cy="6858000"/>
           </a:xfrm>
           <a:prstGeom prst="rect">
             <a:avLst/>
@@ -4163,119 +4242,14 @@
       </p:sp>
       <p:sp>
         <p:nvSpPr>
-          <p:cNvPr id="3" name="TextBox 2"/>
-          <p:cNvSpPr txBox="1"/>
-          <p:nvPr/>
-        </p:nvSpPr>
-        <p:spPr>
-          <a:xfrm>
-            <a:off x="457200" y="6419088"/>
-            <a:ext cx="3657600" cy="274320"/>
-          </a:xfrm>
-          <a:prstGeom prst="rect">
-            <a:avLst/>
-          </a:prstGeom>
-          <a:noFill/>
-        </p:spPr>
-        <p:txBody>
-          <a:bodyPr wrap="none">
-            <a:spAutoFit/>
-          </a:bodyPr>
-          <a:lstStyle/>
-          <a:p>
-            <a:pPr algn="l"/>
-            <a:r>
-              <a:rPr sz="900" b="0">
-                <a:solidFill>
-                  <a:srgbClr val="6E6A8A"/>
-                </a:solidFill>
-                <a:latin typeface="Microsoft YaHei"/>
-              </a:rPr>
-              <a:t>LESSONFORGE 微课</a:t>
-            </a:r>
-          </a:p>
-        </p:txBody>
-      </p:sp>
-      <p:sp>
-        <p:nvSpPr>
-          <p:cNvPr id="4" name="TextBox 3"/>
-          <p:cNvSpPr txBox="1"/>
-          <p:nvPr/>
-        </p:nvSpPr>
-        <p:spPr>
-          <a:xfrm>
-            <a:off x="10607040" y="6419088"/>
-            <a:ext cx="1097280" cy="274320"/>
-          </a:xfrm>
-          <a:prstGeom prst="rect">
-            <a:avLst/>
-          </a:prstGeom>
-          <a:noFill/>
-        </p:spPr>
-        <p:txBody>
-          <a:bodyPr wrap="none">
-            <a:spAutoFit/>
-          </a:bodyPr>
-          <a:lstStyle/>
-          <a:p>
-            <a:pPr algn="r"/>
-            <a:r>
-              <a:rPr sz="1000" b="1">
-                <a:solidFill>
-                  <a:srgbClr val="6E6A8A"/>
-                </a:solidFill>
-                <a:latin typeface="Microsoft YaHei"/>
-              </a:rPr>
-              <a:t>12</a:t>
-            </a:r>
-          </a:p>
-        </p:txBody>
-      </p:sp>
-      <p:sp>
-        <p:nvSpPr>
-          <p:cNvPr id="5" name="TextBox 4"/>
-          <p:cNvSpPr txBox="1"/>
-          <p:nvPr/>
-        </p:nvSpPr>
-        <p:spPr>
-          <a:xfrm>
-            <a:off x="548640" y="457200"/>
-            <a:ext cx="11064240" cy="777240"/>
-          </a:xfrm>
-          <a:prstGeom prst="rect">
-            <a:avLst/>
-          </a:prstGeom>
-          <a:noFill/>
-        </p:spPr>
-        <p:txBody>
-          <a:bodyPr wrap="square" lIns="18288" rIns="18288" tIns="9144" bIns="9144" anchor="ctr">
-            <a:spAutoFit/>
-          </a:bodyPr>
-          <a:lstStyle/>
-          <a:p>
-            <a:pPr algn="l"/>
-            <a:r>
-              <a:rPr sz="2800" b="1" i="0">
-                <a:solidFill>
-                  <a:srgbClr val="5B3DF5"/>
-                </a:solidFill>
-                <a:latin typeface="Microsoft YaHei"/>
-              </a:rPr>
-              <a:t/>
-            </a:r>
-          </a:p>
-        </p:txBody>
-      </p:sp>
-      <p:sp>
-        <p:nvSpPr>
-          <p:cNvPr id="6" name="Rectangle 5"/>
+          <p:cNvPr id="3" name="Rectangle 2"/>
           <p:cNvSpPr/>
           <p:nvPr/>
         </p:nvSpPr>
         <p:spPr>
           <a:xfrm>
-            <a:off x="566928" y="1298448"/>
-            <a:ext cx="1234440" cy="82296"/>
+            <a:off x="1554480" y="0"/>
+            <a:ext cx="64008" cy="6858000"/>
           </a:xfrm>
           <a:prstGeom prst="rect">
             <a:avLst/>
@@ -4312,14 +4286,84 @@
       </p:sp>
       <p:sp>
         <p:nvSpPr>
-          <p:cNvPr id="7" name="TextBox 6"/>
-          <p:cNvSpPr txBox="1"/>
-          <p:nvPr/>
-        </p:nvSpPr>
-        <p:spPr>
-          <a:xfrm>
-            <a:off x="594360" y="1645920"/>
-            <a:ext cx="10972800" cy="548640"/>
+          <p:cNvPr id="4" name="TextBox 3"/>
+          <p:cNvSpPr txBox="1"/>
+          <p:nvPr/>
+        </p:nvSpPr>
+        <p:spPr>
+          <a:xfrm>
+            <a:off x="411480" y="6419088"/>
+            <a:ext cx="1097280" cy="274320"/>
+          </a:xfrm>
+          <a:prstGeom prst="rect">
+            <a:avLst/>
+          </a:prstGeom>
+          <a:noFill/>
+        </p:spPr>
+        <p:txBody>
+          <a:bodyPr wrap="none">
+            <a:spAutoFit/>
+          </a:bodyPr>
+          <a:lstStyle/>
+          <a:p>
+            <a:pPr algn="l"/>
+            <a:r>
+              <a:rPr sz="900" b="0">
+                <a:solidFill>
+                  <a:srgbClr val="FFFFFF"/>
+                </a:solidFill>
+                <a:latin typeface="Microsoft YaHei"/>
+              </a:rPr>
+              <a:t>LESSONFORGE 微课</a:t>
+            </a:r>
+          </a:p>
+        </p:txBody>
+      </p:sp>
+      <p:sp>
+        <p:nvSpPr>
+          <p:cNvPr id="5" name="TextBox 4"/>
+          <p:cNvSpPr txBox="1"/>
+          <p:nvPr/>
+        </p:nvSpPr>
+        <p:spPr>
+          <a:xfrm>
+            <a:off x="10607040" y="6419088"/>
+            <a:ext cx="1097280" cy="274320"/>
+          </a:xfrm>
+          <a:prstGeom prst="rect">
+            <a:avLst/>
+          </a:prstGeom>
+          <a:noFill/>
+        </p:spPr>
+        <p:txBody>
+          <a:bodyPr wrap="none">
+            <a:spAutoFit/>
+          </a:bodyPr>
+          <a:lstStyle/>
+          <a:p>
+            <a:pPr algn="r"/>
+            <a:r>
+              <a:rPr sz="1000" b="1">
+                <a:solidFill>
+                  <a:srgbClr val="6E6A8A"/>
+                </a:solidFill>
+                <a:latin typeface="Microsoft YaHei"/>
+              </a:rPr>
+              <a:t>12</a:t>
+            </a:r>
+          </a:p>
+        </p:txBody>
+      </p:sp>
+      <p:sp>
+        <p:nvSpPr>
+          <p:cNvPr id="6" name="TextBox 5"/>
+          <p:cNvSpPr txBox="1"/>
+          <p:nvPr/>
+        </p:nvSpPr>
+        <p:spPr>
+          <a:xfrm>
+            <a:off x="1828800" y="502920"/>
+            <a:ext cx="9966960" cy="777240"/>
           </a:xfrm>
           <a:prstGeom prst="rect">
             <a:avLst/>
@@ -4334,6 +4378,85 @@
           <a:p>
             <a:pPr algn="l"/>
             <a:r>
+              <a:rPr sz="2800" b="1" i="0">
+                <a:solidFill>
+                  <a:srgbClr val="5B3DF5"/>
+                </a:solidFill>
+                <a:latin typeface="Microsoft YaHei"/>
+              </a:rPr>
+              <a:t/>
+            </a:r>
+          </a:p>
+        </p:txBody>
+      </p:sp>
+      <p:sp>
+        <p:nvSpPr>
+          <p:cNvPr id="7" name="Rectangle 6"/>
+          <p:cNvSpPr/>
+          <p:nvPr/>
+        </p:nvSpPr>
+        <p:spPr>
+          <a:xfrm>
+            <a:off x="1856231" y="1335024"/>
+            <a:ext cx="1234440" cy="82296"/>
+          </a:xfrm>
+          <a:prstGeom prst="rect">
+            <a:avLst/>
+          </a:prstGeom>
+          <a:solidFill>
+            <a:srgbClr val="5B3DF5"/>
+          </a:solidFill>
+          <a:ln>
+            <a:noFill/>
+          </a:ln>
+          <a:effectLst/>
+        </p:spPr>
+        <p:style>
+          <a:lnRef idx="1">
+            <a:schemeClr val="accent1"/>
+          </a:lnRef>
+          <a:fillRef idx="3">
+            <a:schemeClr val="accent1"/>
+          </a:fillRef>
+          <a:effectRef idx="2">
+            <a:schemeClr val="accent1"/>
+          </a:effectRef>
+          <a:fontRef idx="minor">
+            <a:schemeClr val="lt1"/>
+          </a:fontRef>
+        </p:style>
+        <p:txBody>
+          <a:bodyPr rtlCol="0" anchor="ctr"/>
+          <a:lstStyle/>
+          <a:p>
+            <a:pPr algn="ctr"/>
+          </a:p>
+        </p:txBody>
+      </p:sp>
+      <p:sp>
+        <p:nvSpPr>
+          <p:cNvPr id="8" name="TextBox 7"/>
+          <p:cNvSpPr txBox="1"/>
+          <p:nvPr/>
+        </p:nvSpPr>
+        <p:spPr>
+          <a:xfrm>
+            <a:off x="1828800" y="1645920"/>
+            <a:ext cx="9966960" cy="548640"/>
+          </a:xfrm>
+          <a:prstGeom prst="rect">
+            <a:avLst/>
+          </a:prstGeom>
+          <a:noFill/>
+        </p:spPr>
+        <p:txBody>
+          <a:bodyPr wrap="square" lIns="18288" rIns="18288" tIns="9144" bIns="9144" anchor="ctr">
+            <a:spAutoFit/>
+          </a:bodyPr>
+          <a:lstStyle/>
+          <a:p>
+            <a:pPr algn="l"/>
+            <a:r>
               <a:rPr sz="1700" b="1" i="0">
                 <a:solidFill>
                   <a:srgbClr val="5B3DF5"/>
@@ -4347,14 +4470,14 @@
       </p:sp>
       <p:sp>
         <p:nvSpPr>
-          <p:cNvPr id="8" name="TextBox 7"/>
-          <p:cNvSpPr txBox="1"/>
-          <p:nvPr/>
-        </p:nvSpPr>
-        <p:spPr>
-          <a:xfrm>
-            <a:off x="594360" y="2331720"/>
-            <a:ext cx="5394960" cy="548640"/>
+          <p:cNvPr id="9" name="TextBox 8"/>
+          <p:cNvSpPr txBox="1"/>
+          <p:nvPr/>
+        </p:nvSpPr>
+        <p:spPr>
+          <a:xfrm>
+            <a:off x="1828800" y="2377440"/>
+            <a:ext cx="4572000" cy="914400"/>
           </a:xfrm>
           <a:prstGeom prst="rect">
             <a:avLst/>
@@ -4382,14 +4505,14 @@
       </p:sp>
       <p:sp>
         <p:nvSpPr>
-          <p:cNvPr id="9" name="TextBox 8"/>
-          <p:cNvSpPr txBox="1"/>
-          <p:nvPr/>
-        </p:nvSpPr>
-        <p:spPr>
-          <a:xfrm>
-            <a:off x="6263640" y="2331720"/>
-            <a:ext cx="5394960" cy="548640"/>
+          <p:cNvPr id="10" name="TextBox 9"/>
+          <p:cNvSpPr txBox="1"/>
+          <p:nvPr/>
+        </p:nvSpPr>
+        <p:spPr>
+          <a:xfrm>
+            <a:off x="7132320" y="2377440"/>
+            <a:ext cx="4572000" cy="914400"/>
           </a:xfrm>
           <a:prstGeom prst="rect">
             <a:avLst/>
@@ -4417,14 +4540,14 @@
       </p:sp>
       <p:sp>
         <p:nvSpPr>
-          <p:cNvPr id="10" name="TextBox 9"/>
-          <p:cNvSpPr txBox="1"/>
-          <p:nvPr/>
-        </p:nvSpPr>
-        <p:spPr>
-          <a:xfrm>
-            <a:off x="594360" y="3017520"/>
-            <a:ext cx="5394960" cy="548640"/>
+          <p:cNvPr id="11" name="TextBox 10"/>
+          <p:cNvSpPr txBox="1"/>
+          <p:nvPr/>
+        </p:nvSpPr>
+        <p:spPr>
+          <a:xfrm>
+            <a:off x="1828800" y="3749039"/>
+            <a:ext cx="4572000" cy="914400"/>
           </a:xfrm>
           <a:prstGeom prst="rect">
             <a:avLst/>
@@ -4452,14 +4575,14 @@
       </p:sp>
       <p:sp>
         <p:nvSpPr>
-          <p:cNvPr id="11" name="TextBox 10"/>
-          <p:cNvSpPr txBox="1"/>
-          <p:nvPr/>
-        </p:nvSpPr>
-        <p:spPr>
-          <a:xfrm>
-            <a:off x="6263640" y="3017520"/>
-            <a:ext cx="5394960" cy="548640"/>
+          <p:cNvPr id="12" name="TextBox 11"/>
+          <p:cNvSpPr txBox="1"/>
+          <p:nvPr/>
+        </p:nvSpPr>
+        <p:spPr>
+          <a:xfrm>
+            <a:off x="7132320" y="3749039"/>
+            <a:ext cx="4572000" cy="914400"/>
           </a:xfrm>
           <a:prstGeom prst="rect">
             <a:avLst/>
@@ -4487,14 +4610,14 @@
       </p:sp>
       <p:sp>
         <p:nvSpPr>
-          <p:cNvPr id="12" name="TextBox 11"/>
-          <p:cNvSpPr txBox="1"/>
-          <p:nvPr/>
-        </p:nvSpPr>
-        <p:spPr>
-          <a:xfrm>
-            <a:off x="594360" y="3703320"/>
-            <a:ext cx="5394960" cy="548640"/>
+          <p:cNvPr id="13" name="TextBox 12"/>
+          <p:cNvSpPr txBox="1"/>
+          <p:nvPr/>
+        </p:nvSpPr>
+        <p:spPr>
+          <a:xfrm>
+            <a:off x="1828800" y="5120640"/>
+            <a:ext cx="4572000" cy="914400"/>
           </a:xfrm>
           <a:prstGeom prst="rect">
             <a:avLst/>
@@ -4522,14 +4645,14 @@
       </p:sp>
       <p:sp>
         <p:nvSpPr>
-          <p:cNvPr id="13" name="TextBox 12"/>
-          <p:cNvSpPr txBox="1"/>
-          <p:nvPr/>
-        </p:nvSpPr>
-        <p:spPr>
-          <a:xfrm>
-            <a:off x="6263640" y="3703320"/>
-            <a:ext cx="5394960" cy="548640"/>
+          <p:cNvPr id="14" name="TextBox 13"/>
+          <p:cNvSpPr txBox="1"/>
+          <p:nvPr/>
+        </p:nvSpPr>
+        <p:spPr>
+          <a:xfrm>
+            <a:off x="7132320" y="5120640"/>
+            <a:ext cx="4572000" cy="914400"/>
           </a:xfrm>
           <a:prstGeom prst="rect">
             <a:avLst/>
@@ -4557,84 +4680,14 @@
       </p:sp>
       <p:sp>
         <p:nvSpPr>
-          <p:cNvPr id="14" name="TextBox 13"/>
-          <p:cNvSpPr txBox="1"/>
-          <p:nvPr/>
-        </p:nvSpPr>
-        <p:spPr>
-          <a:xfrm>
-            <a:off x="594360" y="4389120"/>
-            <a:ext cx="5394960" cy="548640"/>
-          </a:xfrm>
-          <a:prstGeom prst="rect">
-            <a:avLst/>
-          </a:prstGeom>
-          <a:noFill/>
-        </p:spPr>
-        <p:txBody>
-          <a:bodyPr wrap="square" lIns="18288" rIns="18288" tIns="9144" bIns="9144" anchor="ctr">
-            <a:spAutoFit/>
-          </a:bodyPr>
-          <a:lstStyle/>
-          <a:p>
-            <a:pPr algn="l"/>
-            <a:r>
-              <a:rPr sz="1600" b="0" i="0">
-                <a:solidFill>
-                  <a:srgbClr val="1B1830"/>
-                </a:solidFill>
-                <a:latin typeface="Microsoft YaHei"/>
-              </a:rPr>
-              <a:t/>
-            </a:r>
-          </a:p>
-        </p:txBody>
-      </p:sp>
-      <p:sp>
-        <p:nvSpPr>
           <p:cNvPr id="15" name="TextBox 14"/>
           <p:cNvSpPr txBox="1"/>
           <p:nvPr/>
         </p:nvSpPr>
         <p:spPr>
           <a:xfrm>
-            <a:off x="6263640" y="4389120"/>
-            <a:ext cx="5394960" cy="548640"/>
-          </a:xfrm>
-          <a:prstGeom prst="rect">
-            <a:avLst/>
-          </a:prstGeom>
-          <a:noFill/>
-        </p:spPr>
-        <p:txBody>
-          <a:bodyPr wrap="square" lIns="18288" rIns="18288" tIns="9144" bIns="9144" anchor="ctr">
-            <a:spAutoFit/>
-          </a:bodyPr>
-          <a:lstStyle/>
-          <a:p>
-            <a:pPr algn="l"/>
-            <a:r>
-              <a:rPr sz="1600" b="0" i="0">
-                <a:solidFill>
-                  <a:srgbClr val="1B1830"/>
-                </a:solidFill>
-                <a:latin typeface="Microsoft YaHei"/>
-              </a:rPr>
-              <a:t/>
-            </a:r>
-          </a:p>
-        </p:txBody>
-      </p:sp>
-      <p:sp>
-        <p:nvSpPr>
-          <p:cNvPr id="16" name="TextBox 15"/>
-          <p:cNvSpPr txBox="1"/>
-          <p:nvPr/>
-        </p:nvSpPr>
-        <p:spPr>
-          <a:xfrm>
-            <a:off x="594360" y="5349240"/>
-            <a:ext cx="10972800" cy="685800"/>
+            <a:off x="1828800" y="5486400"/>
+            <a:ext cx="9966960" cy="640080"/>
           </a:xfrm>
           <a:prstGeom prst="rect">
             <a:avLst/>
@@ -4695,7 +4748,7 @@
         <p:spPr>
           <a:xfrm>
             <a:off x="0" y="0"/>
-            <a:ext cx="118872" cy="6858000"/>
+            <a:ext cx="1554480" cy="6858000"/>
           </a:xfrm>
           <a:prstGeom prst="rect">
             <a:avLst/>
@@ -4732,119 +4785,14 @@
       </p:sp>
       <p:sp>
         <p:nvSpPr>
-          <p:cNvPr id="3" name="TextBox 2"/>
-          <p:cNvSpPr txBox="1"/>
-          <p:nvPr/>
-        </p:nvSpPr>
-        <p:spPr>
-          <a:xfrm>
-            <a:off x="457200" y="6419088"/>
-            <a:ext cx="3657600" cy="274320"/>
-          </a:xfrm>
-          <a:prstGeom prst="rect">
-            <a:avLst/>
-          </a:prstGeom>
-          <a:noFill/>
-        </p:spPr>
-        <p:txBody>
-          <a:bodyPr wrap="none">
-            <a:spAutoFit/>
-          </a:bodyPr>
-          <a:lstStyle/>
-          <a:p>
-            <a:pPr algn="l"/>
-            <a:r>
-              <a:rPr sz="900" b="0">
-                <a:solidFill>
-                  <a:srgbClr val="6E6A8A"/>
-                </a:solidFill>
-                <a:latin typeface="Microsoft YaHei"/>
-              </a:rPr>
-              <a:t>LESSONFORGE 微课</a:t>
-            </a:r>
-          </a:p>
-        </p:txBody>
-      </p:sp>
-      <p:sp>
-        <p:nvSpPr>
-          <p:cNvPr id="4" name="TextBox 3"/>
-          <p:cNvSpPr txBox="1"/>
-          <p:nvPr/>
-        </p:nvSpPr>
-        <p:spPr>
-          <a:xfrm>
-            <a:off x="10607040" y="6419088"/>
-            <a:ext cx="1097280" cy="274320"/>
-          </a:xfrm>
-          <a:prstGeom prst="rect">
-            <a:avLst/>
-          </a:prstGeom>
-          <a:noFill/>
-        </p:spPr>
-        <p:txBody>
-          <a:bodyPr wrap="none">
-            <a:spAutoFit/>
-          </a:bodyPr>
-          <a:lstStyle/>
-          <a:p>
-            <a:pPr algn="r"/>
-            <a:r>
-              <a:rPr sz="1000" b="1">
-                <a:solidFill>
-                  <a:srgbClr val="6E6A8A"/>
-                </a:solidFill>
-                <a:latin typeface="Microsoft YaHei"/>
-              </a:rPr>
-              <a:t>13</a:t>
-            </a:r>
-          </a:p>
-        </p:txBody>
-      </p:sp>
-      <p:sp>
-        <p:nvSpPr>
-          <p:cNvPr id="5" name="TextBox 4"/>
-          <p:cNvSpPr txBox="1"/>
-          <p:nvPr/>
-        </p:nvSpPr>
-        <p:spPr>
-          <a:xfrm>
-            <a:off x="548640" y="457200"/>
-            <a:ext cx="11064240" cy="777240"/>
-          </a:xfrm>
-          <a:prstGeom prst="rect">
-            <a:avLst/>
-          </a:prstGeom>
-          <a:noFill/>
-        </p:spPr>
-        <p:txBody>
-          <a:bodyPr wrap="square" lIns="18288" rIns="18288" tIns="9144" bIns="9144" anchor="ctr">
-            <a:spAutoFit/>
-          </a:bodyPr>
-          <a:lstStyle/>
-          <a:p>
-            <a:pPr algn="l"/>
-            <a:r>
-              <a:rPr sz="2800" b="1" i="0">
-                <a:solidFill>
-                  <a:srgbClr val="5B3DF5"/>
-                </a:solidFill>
-                <a:latin typeface="Microsoft YaHei"/>
-              </a:rPr>
-              <a:t/>
-            </a:r>
-          </a:p>
-        </p:txBody>
-      </p:sp>
-      <p:sp>
-        <p:nvSpPr>
-          <p:cNvPr id="6" name="Rectangle 5"/>
+          <p:cNvPr id="3" name="Rectangle 2"/>
           <p:cNvSpPr/>
           <p:nvPr/>
         </p:nvSpPr>
         <p:spPr>
           <a:xfrm>
-            <a:off x="566928" y="1298448"/>
-            <a:ext cx="1234440" cy="82296"/>
+            <a:off x="1554480" y="0"/>
+            <a:ext cx="64008" cy="6858000"/>
           </a:xfrm>
           <a:prstGeom prst="rect">
             <a:avLst/>
@@ -4881,14 +4829,84 @@
       </p:sp>
       <p:sp>
         <p:nvSpPr>
-          <p:cNvPr id="7" name="TextBox 6"/>
-          <p:cNvSpPr txBox="1"/>
-          <p:nvPr/>
-        </p:nvSpPr>
-        <p:spPr>
-          <a:xfrm>
-            <a:off x="914400" y="1691640"/>
-            <a:ext cx="10332720" cy="457200"/>
+          <p:cNvPr id="4" name="TextBox 3"/>
+          <p:cNvSpPr txBox="1"/>
+          <p:nvPr/>
+        </p:nvSpPr>
+        <p:spPr>
+          <a:xfrm>
+            <a:off x="411480" y="6419088"/>
+            <a:ext cx="1097280" cy="274320"/>
+          </a:xfrm>
+          <a:prstGeom prst="rect">
+            <a:avLst/>
+          </a:prstGeom>
+          <a:noFill/>
+        </p:spPr>
+        <p:txBody>
+          <a:bodyPr wrap="none">
+            <a:spAutoFit/>
+          </a:bodyPr>
+          <a:lstStyle/>
+          <a:p>
+            <a:pPr algn="l"/>
+            <a:r>
+              <a:rPr sz="900" b="0">
+                <a:solidFill>
+                  <a:srgbClr val="FFFFFF"/>
+                </a:solidFill>
+                <a:latin typeface="Microsoft YaHei"/>
+              </a:rPr>
+              <a:t>LESSONFORGE 微课</a:t>
+            </a:r>
+          </a:p>
+        </p:txBody>
+      </p:sp>
+      <p:sp>
+        <p:nvSpPr>
+          <p:cNvPr id="5" name="TextBox 4"/>
+          <p:cNvSpPr txBox="1"/>
+          <p:nvPr/>
+        </p:nvSpPr>
+        <p:spPr>
+          <a:xfrm>
+            <a:off x="10607040" y="6419088"/>
+            <a:ext cx="1097280" cy="274320"/>
+          </a:xfrm>
+          <a:prstGeom prst="rect">
+            <a:avLst/>
+          </a:prstGeom>
+          <a:noFill/>
+        </p:spPr>
+        <p:txBody>
+          <a:bodyPr wrap="none">
+            <a:spAutoFit/>
+          </a:bodyPr>
+          <a:lstStyle/>
+          <a:p>
+            <a:pPr algn="r"/>
+            <a:r>
+              <a:rPr sz="1000" b="1">
+                <a:solidFill>
+                  <a:srgbClr val="6E6A8A"/>
+                </a:solidFill>
+                <a:latin typeface="Microsoft YaHei"/>
+              </a:rPr>
+              <a:t>13</a:t>
+            </a:r>
+          </a:p>
+        </p:txBody>
+      </p:sp>
+      <p:sp>
+        <p:nvSpPr>
+          <p:cNvPr id="6" name="TextBox 5"/>
+          <p:cNvSpPr txBox="1"/>
+          <p:nvPr/>
+        </p:nvSpPr>
+        <p:spPr>
+          <a:xfrm>
+            <a:off x="1828800" y="502920"/>
+            <a:ext cx="9966960" cy="777240"/>
           </a:xfrm>
           <a:prstGeom prst="rect">
             <a:avLst/>
@@ -4903,6 +4921,85 @@
           <a:p>
             <a:pPr algn="l"/>
             <a:r>
+              <a:rPr sz="2800" b="1" i="0">
+                <a:solidFill>
+                  <a:srgbClr val="5B3DF5"/>
+                </a:solidFill>
+                <a:latin typeface="Microsoft YaHei"/>
+              </a:rPr>
+              <a:t/>
+            </a:r>
+          </a:p>
+        </p:txBody>
+      </p:sp>
+      <p:sp>
+        <p:nvSpPr>
+          <p:cNvPr id="7" name="Rectangle 6"/>
+          <p:cNvSpPr/>
+          <p:nvPr/>
+        </p:nvSpPr>
+        <p:spPr>
+          <a:xfrm>
+            <a:off x="1856231" y="1335024"/>
+            <a:ext cx="1234440" cy="82296"/>
+          </a:xfrm>
+          <a:prstGeom prst="rect">
+            <a:avLst/>
+          </a:prstGeom>
+          <a:solidFill>
+            <a:srgbClr val="5B3DF5"/>
+          </a:solidFill>
+          <a:ln>
+            <a:noFill/>
+          </a:ln>
+          <a:effectLst/>
+        </p:spPr>
+        <p:style>
+          <a:lnRef idx="1">
+            <a:schemeClr val="accent1"/>
+          </a:lnRef>
+          <a:fillRef idx="3">
+            <a:schemeClr val="accent1"/>
+          </a:fillRef>
+          <a:effectRef idx="2">
+            <a:schemeClr val="accent1"/>
+          </a:effectRef>
+          <a:fontRef idx="minor">
+            <a:schemeClr val="lt1"/>
+          </a:fontRef>
+        </p:style>
+        <p:txBody>
+          <a:bodyPr rtlCol="0" anchor="ctr"/>
+          <a:lstStyle/>
+          <a:p>
+            <a:pPr algn="ctr"/>
+          </a:p>
+        </p:txBody>
+      </p:sp>
+      <p:sp>
+        <p:nvSpPr>
+          <p:cNvPr id="8" name="TextBox 7"/>
+          <p:cNvSpPr txBox="1"/>
+          <p:nvPr/>
+        </p:nvSpPr>
+        <p:spPr>
+          <a:xfrm>
+            <a:off x="1828800" y="1691640"/>
+            <a:ext cx="9966960" cy="457200"/>
+          </a:xfrm>
+          <a:prstGeom prst="rect">
+            <a:avLst/>
+          </a:prstGeom>
+          <a:noFill/>
+        </p:spPr>
+        <p:txBody>
+          <a:bodyPr wrap="square" lIns="18288" rIns="18288" tIns="9144" bIns="9144" anchor="ctr">
+            <a:spAutoFit/>
+          </a:bodyPr>
+          <a:lstStyle/>
+          <a:p>
+            <a:pPr algn="l"/>
+            <a:r>
               <a:rPr sz="1500" b="1" i="0">
                 <a:solidFill>
                   <a:srgbClr val="1B1830"/>
@@ -4916,14 +5013,14 @@
       </p:sp>
       <p:sp>
         <p:nvSpPr>
-          <p:cNvPr id="8" name="TextBox 7"/>
-          <p:cNvSpPr txBox="1"/>
-          <p:nvPr/>
-        </p:nvSpPr>
-        <p:spPr>
-          <a:xfrm>
-            <a:off x="914400" y="2194560"/>
-            <a:ext cx="10332720" cy="411480"/>
+          <p:cNvPr id="9" name="TextBox 8"/>
+          <p:cNvSpPr txBox="1"/>
+          <p:nvPr/>
+        </p:nvSpPr>
+        <p:spPr>
+          <a:xfrm>
+            <a:off x="1828800" y="2194560"/>
+            <a:ext cx="9966960" cy="411480"/>
           </a:xfrm>
           <a:prstGeom prst="rect">
             <a:avLst/>
@@ -4951,14 +5048,14 @@
       </p:sp>
       <p:sp>
         <p:nvSpPr>
-          <p:cNvPr id="9" name="TextBox 8"/>
-          <p:cNvSpPr txBox="1"/>
-          <p:nvPr/>
-        </p:nvSpPr>
-        <p:spPr>
-          <a:xfrm>
-            <a:off x="914400" y="3017520"/>
-            <a:ext cx="10332720" cy="457200"/>
+          <p:cNvPr id="10" name="TextBox 9"/>
+          <p:cNvSpPr txBox="1"/>
+          <p:nvPr/>
+        </p:nvSpPr>
+        <p:spPr>
+          <a:xfrm>
+            <a:off x="1828800" y="3017520"/>
+            <a:ext cx="9966960" cy="457200"/>
           </a:xfrm>
           <a:prstGeom prst="rect">
             <a:avLst/>
@@ -4986,14 +5083,14 @@
       </p:sp>
       <p:sp>
         <p:nvSpPr>
-          <p:cNvPr id="10" name="TextBox 9"/>
-          <p:cNvSpPr txBox="1"/>
-          <p:nvPr/>
-        </p:nvSpPr>
-        <p:spPr>
-          <a:xfrm>
-            <a:off x="914400" y="3520440"/>
-            <a:ext cx="10332720" cy="411480"/>
+          <p:cNvPr id="11" name="TextBox 10"/>
+          <p:cNvSpPr txBox="1"/>
+          <p:nvPr/>
+        </p:nvSpPr>
+        <p:spPr>
+          <a:xfrm>
+            <a:off x="1828800" y="3520440"/>
+            <a:ext cx="9966960" cy="411480"/>
           </a:xfrm>
           <a:prstGeom prst="rect">
             <a:avLst/>
@@ -5021,14 +5118,14 @@
       </p:sp>
       <p:sp>
         <p:nvSpPr>
-          <p:cNvPr id="11" name="TextBox 10"/>
-          <p:cNvSpPr txBox="1"/>
-          <p:nvPr/>
-        </p:nvSpPr>
-        <p:spPr>
-          <a:xfrm>
-            <a:off x="914400" y="4343400"/>
-            <a:ext cx="10332720" cy="457200"/>
+          <p:cNvPr id="12" name="TextBox 11"/>
+          <p:cNvSpPr txBox="1"/>
+          <p:nvPr/>
+        </p:nvSpPr>
+        <p:spPr>
+          <a:xfrm>
+            <a:off x="1828800" y="4343400"/>
+            <a:ext cx="9966960" cy="457200"/>
           </a:xfrm>
           <a:prstGeom prst="rect">
             <a:avLst/>
@@ -5056,14 +5153,14 @@
       </p:sp>
       <p:sp>
         <p:nvSpPr>
-          <p:cNvPr id="12" name="TextBox 11"/>
-          <p:cNvSpPr txBox="1"/>
-          <p:nvPr/>
-        </p:nvSpPr>
-        <p:spPr>
-          <a:xfrm>
-            <a:off x="914400" y="4846320"/>
-            <a:ext cx="10332720" cy="411480"/>
+          <p:cNvPr id="13" name="TextBox 12"/>
+          <p:cNvSpPr txBox="1"/>
+          <p:nvPr/>
+        </p:nvSpPr>
+        <p:spPr>
+          <a:xfrm>
+            <a:off x="1828800" y="4846320"/>
+            <a:ext cx="9966960" cy="411480"/>
           </a:xfrm>
           <a:prstGeom prst="rect">
             <a:avLst/>
@@ -5091,14 +5188,14 @@
       </p:sp>
       <p:sp>
         <p:nvSpPr>
-          <p:cNvPr id="13" name="TextBox 12"/>
-          <p:cNvSpPr txBox="1"/>
-          <p:nvPr/>
-        </p:nvSpPr>
-        <p:spPr>
-          <a:xfrm>
-            <a:off x="914400" y="5669280"/>
-            <a:ext cx="10332720" cy="365760"/>
+          <p:cNvPr id="14" name="TextBox 13"/>
+          <p:cNvSpPr txBox="1"/>
+          <p:nvPr/>
+        </p:nvSpPr>
+        <p:spPr>
+          <a:xfrm>
+            <a:off x="1828800" y="5669280"/>
+            <a:ext cx="9966960" cy="365760"/>
           </a:xfrm>
           <a:prstGeom prst="rect">
             <a:avLst/>
@@ -5159,7 +5256,7 @@
         <p:spPr>
           <a:xfrm>
             <a:off x="0" y="0"/>
-            <a:ext cx="118872" cy="6858000"/>
+            <a:ext cx="1554480" cy="6858000"/>
           </a:xfrm>
           <a:prstGeom prst="rect">
             <a:avLst/>
@@ -5196,119 +5293,14 @@
       </p:sp>
       <p:sp>
         <p:nvSpPr>
-          <p:cNvPr id="3" name="TextBox 2"/>
-          <p:cNvSpPr txBox="1"/>
-          <p:nvPr/>
-        </p:nvSpPr>
-        <p:spPr>
-          <a:xfrm>
-            <a:off x="457200" y="6419088"/>
-            <a:ext cx="3657600" cy="274320"/>
-          </a:xfrm>
-          <a:prstGeom prst="rect">
-            <a:avLst/>
-          </a:prstGeom>
-          <a:noFill/>
-        </p:spPr>
-        <p:txBody>
-          <a:bodyPr wrap="none">
-            <a:spAutoFit/>
-          </a:bodyPr>
-          <a:lstStyle/>
-          <a:p>
-            <a:pPr algn="l"/>
-            <a:r>
-              <a:rPr sz="900" b="0">
-                <a:solidFill>
-                  <a:srgbClr val="6E6A8A"/>
-                </a:solidFill>
-                <a:latin typeface="Microsoft YaHei"/>
-              </a:rPr>
-              <a:t>LESSONFORGE 微课</a:t>
-            </a:r>
-          </a:p>
-        </p:txBody>
-      </p:sp>
-      <p:sp>
-        <p:nvSpPr>
-          <p:cNvPr id="4" name="TextBox 3"/>
-          <p:cNvSpPr txBox="1"/>
-          <p:nvPr/>
-        </p:nvSpPr>
-        <p:spPr>
-          <a:xfrm>
-            <a:off x="10607040" y="6419088"/>
-            <a:ext cx="1097280" cy="274320"/>
-          </a:xfrm>
-          <a:prstGeom prst="rect">
-            <a:avLst/>
-          </a:prstGeom>
-          <a:noFill/>
-        </p:spPr>
-        <p:txBody>
-          <a:bodyPr wrap="none">
-            <a:spAutoFit/>
-          </a:bodyPr>
-          <a:lstStyle/>
-          <a:p>
-            <a:pPr algn="r"/>
-            <a:r>
-              <a:rPr sz="1000" b="1">
-                <a:solidFill>
-                  <a:srgbClr val="6E6A8A"/>
-                </a:solidFill>
-                <a:latin typeface="Microsoft YaHei"/>
-              </a:rPr>
-              <a:t>14</a:t>
-            </a:r>
-          </a:p>
-        </p:txBody>
-      </p:sp>
-      <p:sp>
-        <p:nvSpPr>
-          <p:cNvPr id="5" name="TextBox 4"/>
-          <p:cNvSpPr txBox="1"/>
-          <p:nvPr/>
-        </p:nvSpPr>
-        <p:spPr>
-          <a:xfrm>
-            <a:off x="548640" y="457200"/>
-            <a:ext cx="11064240" cy="777240"/>
-          </a:xfrm>
-          <a:prstGeom prst="rect">
-            <a:avLst/>
-          </a:prstGeom>
-          <a:noFill/>
-        </p:spPr>
-        <p:txBody>
-          <a:bodyPr wrap="square" lIns="18288" rIns="18288" tIns="9144" bIns="9144" anchor="ctr">
-            <a:spAutoFit/>
-          </a:bodyPr>
-          <a:lstStyle/>
-          <a:p>
-            <a:pPr algn="l"/>
-            <a:r>
-              <a:rPr sz="2800" b="1" i="0">
-                <a:solidFill>
-                  <a:srgbClr val="5B3DF5"/>
-                </a:solidFill>
-                <a:latin typeface="Microsoft YaHei"/>
-              </a:rPr>
-              <a:t/>
-            </a:r>
-          </a:p>
-        </p:txBody>
-      </p:sp>
-      <p:sp>
-        <p:nvSpPr>
-          <p:cNvPr id="6" name="Rectangle 5"/>
+          <p:cNvPr id="3" name="Rectangle 2"/>
           <p:cNvSpPr/>
           <p:nvPr/>
         </p:nvSpPr>
         <p:spPr>
           <a:xfrm>
-            <a:off x="566928" y="1298448"/>
-            <a:ext cx="1234440" cy="82296"/>
+            <a:off x="1554480" y="0"/>
+            <a:ext cx="64008" cy="6858000"/>
           </a:xfrm>
           <a:prstGeom prst="rect">
             <a:avLst/>
@@ -5345,13 +5337,162 @@
       </p:sp>
       <p:sp>
         <p:nvSpPr>
-          <p:cNvPr id="7" name="TextBox 6"/>
-          <p:cNvSpPr txBox="1"/>
-          <p:nvPr/>
-        </p:nvSpPr>
-        <p:spPr>
-          <a:xfrm>
-            <a:off x="914400" y="1737360"/>
+          <p:cNvPr id="4" name="TextBox 3"/>
+          <p:cNvSpPr txBox="1"/>
+          <p:nvPr/>
+        </p:nvSpPr>
+        <p:spPr>
+          <a:xfrm>
+            <a:off x="411480" y="6419088"/>
+            <a:ext cx="1097280" cy="274320"/>
+          </a:xfrm>
+          <a:prstGeom prst="rect">
+            <a:avLst/>
+          </a:prstGeom>
+          <a:noFill/>
+        </p:spPr>
+        <p:txBody>
+          <a:bodyPr wrap="none">
+            <a:spAutoFit/>
+          </a:bodyPr>
+          <a:lstStyle/>
+          <a:p>
+            <a:pPr algn="l"/>
+            <a:r>
+              <a:rPr sz="900" b="0">
+                <a:solidFill>
+                  <a:srgbClr val="FFFFFF"/>
+                </a:solidFill>
+                <a:latin typeface="Microsoft YaHei"/>
+              </a:rPr>
+              <a:t>LESSONFORGE 微课</a:t>
+            </a:r>
+          </a:p>
+        </p:txBody>
+      </p:sp>
+      <p:sp>
+        <p:nvSpPr>
+          <p:cNvPr id="5" name="TextBox 4"/>
+          <p:cNvSpPr txBox="1"/>
+          <p:nvPr/>
+        </p:nvSpPr>
+        <p:spPr>
+          <a:xfrm>
+            <a:off x="10607040" y="6419088"/>
+            <a:ext cx="1097280" cy="274320"/>
+          </a:xfrm>
+          <a:prstGeom prst="rect">
+            <a:avLst/>
+          </a:prstGeom>
+          <a:noFill/>
+        </p:spPr>
+        <p:txBody>
+          <a:bodyPr wrap="none">
+            <a:spAutoFit/>
+          </a:bodyPr>
+          <a:lstStyle/>
+          <a:p>
+            <a:pPr algn="r"/>
+            <a:r>
+              <a:rPr sz="1000" b="1">
+                <a:solidFill>
+                  <a:srgbClr val="6E6A8A"/>
+                </a:solidFill>
+                <a:latin typeface="Microsoft YaHei"/>
+              </a:rPr>
+              <a:t>14</a:t>
+            </a:r>
+          </a:p>
+        </p:txBody>
+      </p:sp>
+      <p:sp>
+        <p:nvSpPr>
+          <p:cNvPr id="6" name="TextBox 5"/>
+          <p:cNvSpPr txBox="1"/>
+          <p:nvPr/>
+        </p:nvSpPr>
+        <p:spPr>
+          <a:xfrm>
+            <a:off x="1828800" y="502920"/>
+            <a:ext cx="9966960" cy="777240"/>
+          </a:xfrm>
+          <a:prstGeom prst="rect">
+            <a:avLst/>
+          </a:prstGeom>
+          <a:noFill/>
+        </p:spPr>
+        <p:txBody>
+          <a:bodyPr wrap="square" lIns="18288" rIns="18288" tIns="9144" bIns="9144" anchor="ctr">
+            <a:spAutoFit/>
+          </a:bodyPr>
+          <a:lstStyle/>
+          <a:p>
+            <a:pPr algn="l"/>
+            <a:r>
+              <a:rPr sz="2800" b="1" i="0">
+                <a:solidFill>
+                  <a:srgbClr val="5B3DF5"/>
+                </a:solidFill>
+                <a:latin typeface="Microsoft YaHei"/>
+              </a:rPr>
+              <a:t/>
+            </a:r>
+          </a:p>
+        </p:txBody>
+      </p:sp>
+      <p:sp>
+        <p:nvSpPr>
+          <p:cNvPr id="7" name="Rectangle 6"/>
+          <p:cNvSpPr/>
+          <p:nvPr/>
+        </p:nvSpPr>
+        <p:spPr>
+          <a:xfrm>
+            <a:off x="1856231" y="1335024"/>
+            <a:ext cx="1234440" cy="82296"/>
+          </a:xfrm>
+          <a:prstGeom prst="rect">
+            <a:avLst/>
+          </a:prstGeom>
+          <a:solidFill>
+            <a:srgbClr val="5B3DF5"/>
+          </a:solidFill>
+          <a:ln>
+            <a:noFill/>
+          </a:ln>
+          <a:effectLst/>
+        </p:spPr>
+        <p:style>
+          <a:lnRef idx="1">
+            <a:schemeClr val="accent1"/>
+          </a:lnRef>
+          <a:fillRef idx="3">
+            <a:schemeClr val="accent1"/>
+          </a:fillRef>
+          <a:effectRef idx="2">
+            <a:schemeClr val="accent1"/>
+          </a:effectRef>
+          <a:fontRef idx="minor">
+            <a:schemeClr val="lt1"/>
+          </a:fontRef>
+        </p:style>
+        <p:txBody>
+          <a:bodyPr rtlCol="0" anchor="ctr"/>
+          <a:lstStyle/>
+          <a:p>
+            <a:pPr algn="ctr"/>
+          </a:p>
+        </p:txBody>
+      </p:sp>
+      <p:sp>
+        <p:nvSpPr>
+          <p:cNvPr id="8" name="TextBox 7"/>
+          <p:cNvSpPr txBox="1"/>
+          <p:nvPr/>
+        </p:nvSpPr>
+        <p:spPr>
+          <a:xfrm>
+            <a:off x="1828800" y="1737360"/>
             <a:ext cx="5486400" cy="457200"/>
           </a:xfrm>
           <a:prstGeom prst="rect">
@@ -5380,14 +5521,14 @@
       </p:sp>
       <p:sp>
         <p:nvSpPr>
-          <p:cNvPr id="8" name="TextBox 7"/>
-          <p:cNvSpPr txBox="1"/>
-          <p:nvPr/>
-        </p:nvSpPr>
-        <p:spPr>
-          <a:xfrm>
-            <a:off x="914400" y="2286000"/>
-            <a:ext cx="10332720" cy="914400"/>
+          <p:cNvPr id="9" name="TextBox 8"/>
+          <p:cNvSpPr txBox="1"/>
+          <p:nvPr/>
+        </p:nvSpPr>
+        <p:spPr>
+          <a:xfrm>
+            <a:off x="1828800" y="2286000"/>
+            <a:ext cx="9966960" cy="914400"/>
           </a:xfrm>
           <a:prstGeom prst="rect">
             <a:avLst/>
@@ -5415,14 +5556,14 @@
       </p:sp>
       <p:sp>
         <p:nvSpPr>
-          <p:cNvPr id="9" name="TextBox 8"/>
-          <p:cNvSpPr txBox="1"/>
-          <p:nvPr/>
-        </p:nvSpPr>
-        <p:spPr>
-          <a:xfrm>
-            <a:off x="914400" y="3611880"/>
-            <a:ext cx="5029200" cy="685800"/>
+          <p:cNvPr id="10" name="TextBox 9"/>
+          <p:cNvSpPr txBox="1"/>
+          <p:nvPr/>
+        </p:nvSpPr>
+        <p:spPr>
+          <a:xfrm>
+            <a:off x="1828800" y="3611880"/>
+            <a:ext cx="4572000" cy="658368"/>
           </a:xfrm>
           <a:prstGeom prst="rect">
             <a:avLst/>
@@ -5450,14 +5591,14 @@
       </p:sp>
       <p:sp>
         <p:nvSpPr>
-          <p:cNvPr id="10" name="TextBox 9"/>
-          <p:cNvSpPr txBox="1"/>
-          <p:nvPr/>
-        </p:nvSpPr>
-        <p:spPr>
-          <a:xfrm>
-            <a:off x="6217920" y="3611880"/>
-            <a:ext cx="5029200" cy="685800"/>
+          <p:cNvPr id="11" name="TextBox 10"/>
+          <p:cNvSpPr txBox="1"/>
+          <p:nvPr/>
+        </p:nvSpPr>
+        <p:spPr>
+          <a:xfrm>
+            <a:off x="7132320" y="3611880"/>
+            <a:ext cx="4572000" cy="658368"/>
           </a:xfrm>
           <a:prstGeom prst="rect">
             <a:avLst/>
@@ -5485,14 +5626,14 @@
       </p:sp>
       <p:sp>
         <p:nvSpPr>
-          <p:cNvPr id="11" name="TextBox 10"/>
-          <p:cNvSpPr txBox="1"/>
-          <p:nvPr/>
-        </p:nvSpPr>
-        <p:spPr>
-          <a:xfrm>
-            <a:off x="914400" y="4434840"/>
-            <a:ext cx="5029200" cy="685800"/>
+          <p:cNvPr id="12" name="TextBox 11"/>
+          <p:cNvSpPr txBox="1"/>
+          <p:nvPr/>
+        </p:nvSpPr>
+        <p:spPr>
+          <a:xfrm>
+            <a:off x="1828800" y="5093208"/>
+            <a:ext cx="4572000" cy="658368"/>
           </a:xfrm>
           <a:prstGeom prst="rect">
             <a:avLst/>
@@ -5520,14 +5661,14 @@
       </p:sp>
       <p:sp>
         <p:nvSpPr>
-          <p:cNvPr id="12" name="TextBox 11"/>
-          <p:cNvSpPr txBox="1"/>
-          <p:nvPr/>
-        </p:nvSpPr>
-        <p:spPr>
-          <a:xfrm>
-            <a:off x="6217920" y="4434840"/>
-            <a:ext cx="5029200" cy="685800"/>
+          <p:cNvPr id="13" name="TextBox 12"/>
+          <p:cNvSpPr txBox="1"/>
+          <p:nvPr/>
+        </p:nvSpPr>
+        <p:spPr>
+          <a:xfrm>
+            <a:off x="7132320" y="5093208"/>
+            <a:ext cx="4572000" cy="658368"/>
           </a:xfrm>
           <a:prstGeom prst="rect">
             <a:avLst/>
@@ -5581,16 +5722,16 @@
       <p:grpSpPr/>
       <p:sp>
         <p:nvSpPr>
-          <p:cNvPr id="2" name="Oval 1"/>
+          <p:cNvPr id="2" name="Rectangle 1"/>
           <p:cNvSpPr/>
           <p:nvPr/>
         </p:nvSpPr>
         <p:spPr>
           <a:xfrm>
-            <a:off x="-1463040" y="4389120"/>
-            <a:ext cx="4572000" cy="4572000"/>
-          </a:xfrm>
-          <a:prstGeom prst="ellipse">
+            <a:off x="0" y="0"/>
+            <a:ext cx="2377440" cy="6858000"/>
+          </a:xfrm>
+          <a:prstGeom prst="rect">
             <a:avLst/>
           </a:prstGeom>
           <a:solidFill>
@@ -5625,14 +5766,58 @@
       </p:sp>
       <p:sp>
         <p:nvSpPr>
-          <p:cNvPr id="3" name="TextBox 2"/>
-          <p:cNvSpPr txBox="1"/>
-          <p:nvPr/>
-        </p:nvSpPr>
-        <p:spPr>
-          <a:xfrm>
-            <a:off x="868680" y="6263640"/>
-            <a:ext cx="5486400" cy="365760"/>
+          <p:cNvPr id="3" name="Oval 2"/>
+          <p:cNvSpPr/>
+          <p:nvPr/>
+        </p:nvSpPr>
+        <p:spPr>
+          <a:xfrm>
+            <a:off x="10424160" y="-1097280"/>
+            <a:ext cx="3108960" cy="3108960"/>
+          </a:xfrm>
+          <a:prstGeom prst="ellipse">
+            <a:avLst/>
+          </a:prstGeom>
+          <a:solidFill>
+            <a:srgbClr val="E2DBFF"/>
+          </a:solidFill>
+          <a:ln>
+            <a:noFill/>
+          </a:ln>
+          <a:effectLst/>
+        </p:spPr>
+        <p:style>
+          <a:lnRef idx="1">
+            <a:schemeClr val="accent1"/>
+          </a:lnRef>
+          <a:fillRef idx="3">
+            <a:schemeClr val="accent1"/>
+          </a:fillRef>
+          <a:effectRef idx="2">
+            <a:schemeClr val="accent1"/>
+          </a:effectRef>
+          <a:fontRef idx="minor">
+            <a:schemeClr val="lt1"/>
+          </a:fontRef>
+        </p:style>
+        <p:txBody>
+          <a:bodyPr rtlCol="0" anchor="ctr"/>
+          <a:lstStyle/>
+          <a:p>
+            <a:pPr algn="ctr"/>
+          </a:p>
+        </p:txBody>
+      </p:sp>
+      <p:sp>
+        <p:nvSpPr>
+          <p:cNvPr id="4" name="TextBox 3"/>
+          <p:cNvSpPr txBox="1"/>
+          <p:nvPr/>
+        </p:nvSpPr>
+        <p:spPr>
+          <a:xfrm>
+            <a:off x="868680" y="6309360"/>
+            <a:ext cx="3657600" cy="365760"/>
           </a:xfrm>
           <a:prstGeom prst="rect">
             <a:avLst/>
@@ -5660,14 +5845,14 @@
       </p:sp>
       <p:sp>
         <p:nvSpPr>
-          <p:cNvPr id="4" name="TextBox 3"/>
-          <p:cNvSpPr txBox="1"/>
-          <p:nvPr/>
-        </p:nvSpPr>
-        <p:spPr>
-          <a:xfrm>
-            <a:off x="914400" y="2011680"/>
-            <a:ext cx="10332720" cy="1188720"/>
+          <p:cNvPr id="5" name="TextBox 4"/>
+          <p:cNvSpPr txBox="1"/>
+          <p:nvPr/>
+        </p:nvSpPr>
+        <p:spPr>
+          <a:xfrm>
+            <a:off x="2926080" y="2194560"/>
+            <a:ext cx="8595360" cy="1188720"/>
           </a:xfrm>
           <a:prstGeom prst="rect">
             <a:avLst/>
@@ -5695,14 +5880,14 @@
       </p:sp>
       <p:sp>
         <p:nvSpPr>
-          <p:cNvPr id="5" name="TextBox 4"/>
-          <p:cNvSpPr txBox="1"/>
-          <p:nvPr/>
-        </p:nvSpPr>
-        <p:spPr>
-          <a:xfrm>
-            <a:off x="914400" y="3474720"/>
-            <a:ext cx="10332720" cy="822960"/>
+          <p:cNvPr id="6" name="TextBox 5"/>
+          <p:cNvSpPr txBox="1"/>
+          <p:nvPr/>
+        </p:nvSpPr>
+        <p:spPr>
+          <a:xfrm>
+            <a:off x="2926080" y="3611880"/>
+            <a:ext cx="8595360" cy="731520"/>
           </a:xfrm>
           <a:prstGeom prst="rect">
             <a:avLst/>
@@ -5719,7 +5904,7 @@
             <a:r>
               <a:rPr sz="2000" b="0" i="0">
                 <a:solidFill>
-                  <a:srgbClr val="FFFFFF"/>
+                  <a:srgbClr val="E2DBFF"/>
                 </a:solidFill>
                 <a:latin typeface="Microsoft YaHei"/>
               </a:rPr>
@@ -5763,7 +5948,7 @@
         <p:spPr>
           <a:xfrm>
             <a:off x="0" y="0"/>
-            <a:ext cx="118872" cy="6858000"/>
+            <a:ext cx="1554480" cy="6858000"/>
           </a:xfrm>
           <a:prstGeom prst="rect">
             <a:avLst/>
@@ -5800,119 +5985,14 @@
       </p:sp>
       <p:sp>
         <p:nvSpPr>
-          <p:cNvPr id="3" name="TextBox 2"/>
-          <p:cNvSpPr txBox="1"/>
-          <p:nvPr/>
-        </p:nvSpPr>
-        <p:spPr>
-          <a:xfrm>
-            <a:off x="457200" y="6419088"/>
-            <a:ext cx="3657600" cy="274320"/>
-          </a:xfrm>
-          <a:prstGeom prst="rect">
-            <a:avLst/>
-          </a:prstGeom>
-          <a:noFill/>
-        </p:spPr>
-        <p:txBody>
-          <a:bodyPr wrap="none">
-            <a:spAutoFit/>
-          </a:bodyPr>
-          <a:lstStyle/>
-          <a:p>
-            <a:pPr algn="l"/>
-            <a:r>
-              <a:rPr sz="900" b="0">
-                <a:solidFill>
-                  <a:srgbClr val="6E6A8A"/>
-                </a:solidFill>
-                <a:latin typeface="Microsoft YaHei"/>
-              </a:rPr>
-              <a:t>LESSONFORGE 微课</a:t>
-            </a:r>
-          </a:p>
-        </p:txBody>
-      </p:sp>
-      <p:sp>
-        <p:nvSpPr>
-          <p:cNvPr id="4" name="TextBox 3"/>
-          <p:cNvSpPr txBox="1"/>
-          <p:nvPr/>
-        </p:nvSpPr>
-        <p:spPr>
-          <a:xfrm>
-            <a:off x="10607040" y="6419088"/>
-            <a:ext cx="1097280" cy="274320"/>
-          </a:xfrm>
-          <a:prstGeom prst="rect">
-            <a:avLst/>
-          </a:prstGeom>
-          <a:noFill/>
-        </p:spPr>
-        <p:txBody>
-          <a:bodyPr wrap="none">
-            <a:spAutoFit/>
-          </a:bodyPr>
-          <a:lstStyle/>
-          <a:p>
-            <a:pPr algn="r"/>
-            <a:r>
-              <a:rPr sz="1000" b="1">
-                <a:solidFill>
-                  <a:srgbClr val="6E6A8A"/>
-                </a:solidFill>
-                <a:latin typeface="Microsoft YaHei"/>
-              </a:rPr>
-              <a:t>02</a:t>
-            </a:r>
-          </a:p>
-        </p:txBody>
-      </p:sp>
-      <p:sp>
-        <p:nvSpPr>
-          <p:cNvPr id="5" name="TextBox 4"/>
-          <p:cNvSpPr txBox="1"/>
-          <p:nvPr/>
-        </p:nvSpPr>
-        <p:spPr>
-          <a:xfrm>
-            <a:off x="548640" y="457200"/>
-            <a:ext cx="11064240" cy="777240"/>
-          </a:xfrm>
-          <a:prstGeom prst="rect">
-            <a:avLst/>
-          </a:prstGeom>
-          <a:noFill/>
-        </p:spPr>
-        <p:txBody>
-          <a:bodyPr wrap="square" lIns="18288" rIns="18288" tIns="9144" bIns="9144" anchor="ctr">
-            <a:spAutoFit/>
-          </a:bodyPr>
-          <a:lstStyle/>
-          <a:p>
-            <a:pPr algn="l"/>
-            <a:r>
-              <a:rPr sz="2800" b="1" i="0">
-                <a:solidFill>
-                  <a:srgbClr val="5B3DF5"/>
-                </a:solidFill>
-                <a:latin typeface="Microsoft YaHei"/>
-              </a:rPr>
-              <a:t/>
-            </a:r>
-          </a:p>
-        </p:txBody>
-      </p:sp>
-      <p:sp>
-        <p:nvSpPr>
-          <p:cNvPr id="6" name="Rectangle 5"/>
+          <p:cNvPr id="3" name="Rectangle 2"/>
           <p:cNvSpPr/>
           <p:nvPr/>
         </p:nvSpPr>
         <p:spPr>
           <a:xfrm>
-            <a:off x="566928" y="1298448"/>
-            <a:ext cx="1234440" cy="82296"/>
+            <a:off x="1554480" y="0"/>
+            <a:ext cx="64008" cy="6858000"/>
           </a:xfrm>
           <a:prstGeom prst="rect">
             <a:avLst/>
@@ -5949,14 +6029,84 @@
       </p:sp>
       <p:sp>
         <p:nvSpPr>
-          <p:cNvPr id="7" name="TextBox 6"/>
-          <p:cNvSpPr txBox="1"/>
-          <p:nvPr/>
-        </p:nvSpPr>
-        <p:spPr>
-          <a:xfrm>
-            <a:off x="594360" y="1645920"/>
-            <a:ext cx="10972800" cy="960120"/>
+          <p:cNvPr id="4" name="TextBox 3"/>
+          <p:cNvSpPr txBox="1"/>
+          <p:nvPr/>
+        </p:nvSpPr>
+        <p:spPr>
+          <a:xfrm>
+            <a:off x="411480" y="6419088"/>
+            <a:ext cx="1097280" cy="274320"/>
+          </a:xfrm>
+          <a:prstGeom prst="rect">
+            <a:avLst/>
+          </a:prstGeom>
+          <a:noFill/>
+        </p:spPr>
+        <p:txBody>
+          <a:bodyPr wrap="none">
+            <a:spAutoFit/>
+          </a:bodyPr>
+          <a:lstStyle/>
+          <a:p>
+            <a:pPr algn="l"/>
+            <a:r>
+              <a:rPr sz="900" b="0">
+                <a:solidFill>
+                  <a:srgbClr val="FFFFFF"/>
+                </a:solidFill>
+                <a:latin typeface="Microsoft YaHei"/>
+              </a:rPr>
+              <a:t>LESSONFORGE 微课</a:t>
+            </a:r>
+          </a:p>
+        </p:txBody>
+      </p:sp>
+      <p:sp>
+        <p:nvSpPr>
+          <p:cNvPr id="5" name="TextBox 4"/>
+          <p:cNvSpPr txBox="1"/>
+          <p:nvPr/>
+        </p:nvSpPr>
+        <p:spPr>
+          <a:xfrm>
+            <a:off x="10607040" y="6419088"/>
+            <a:ext cx="1097280" cy="274320"/>
+          </a:xfrm>
+          <a:prstGeom prst="rect">
+            <a:avLst/>
+          </a:prstGeom>
+          <a:noFill/>
+        </p:spPr>
+        <p:txBody>
+          <a:bodyPr wrap="none">
+            <a:spAutoFit/>
+          </a:bodyPr>
+          <a:lstStyle/>
+          <a:p>
+            <a:pPr algn="r"/>
+            <a:r>
+              <a:rPr sz="1000" b="1">
+                <a:solidFill>
+                  <a:srgbClr val="6E6A8A"/>
+                </a:solidFill>
+                <a:latin typeface="Microsoft YaHei"/>
+              </a:rPr>
+              <a:t>02</a:t>
+            </a:r>
+          </a:p>
+        </p:txBody>
+      </p:sp>
+      <p:sp>
+        <p:nvSpPr>
+          <p:cNvPr id="6" name="TextBox 5"/>
+          <p:cNvSpPr txBox="1"/>
+          <p:nvPr/>
+        </p:nvSpPr>
+        <p:spPr>
+          <a:xfrm>
+            <a:off x="1828800" y="502920"/>
+            <a:ext cx="9966960" cy="777240"/>
           </a:xfrm>
           <a:prstGeom prst="rect">
             <a:avLst/>
@@ -5971,6 +6121,85 @@
           <a:p>
             <a:pPr algn="l"/>
             <a:r>
+              <a:rPr sz="2800" b="1" i="0">
+                <a:solidFill>
+                  <a:srgbClr val="5B3DF5"/>
+                </a:solidFill>
+                <a:latin typeface="Microsoft YaHei"/>
+              </a:rPr>
+              <a:t/>
+            </a:r>
+          </a:p>
+        </p:txBody>
+      </p:sp>
+      <p:sp>
+        <p:nvSpPr>
+          <p:cNvPr id="7" name="Rectangle 6"/>
+          <p:cNvSpPr/>
+          <p:nvPr/>
+        </p:nvSpPr>
+        <p:spPr>
+          <a:xfrm>
+            <a:off x="1856231" y="1335024"/>
+            <a:ext cx="1234440" cy="82296"/>
+          </a:xfrm>
+          <a:prstGeom prst="rect">
+            <a:avLst/>
+          </a:prstGeom>
+          <a:solidFill>
+            <a:srgbClr val="5B3DF5"/>
+          </a:solidFill>
+          <a:ln>
+            <a:noFill/>
+          </a:ln>
+          <a:effectLst/>
+        </p:spPr>
+        <p:style>
+          <a:lnRef idx="1">
+            <a:schemeClr val="accent1"/>
+          </a:lnRef>
+          <a:fillRef idx="3">
+            <a:schemeClr val="accent1"/>
+          </a:fillRef>
+          <a:effectRef idx="2">
+            <a:schemeClr val="accent1"/>
+          </a:effectRef>
+          <a:fontRef idx="minor">
+            <a:schemeClr val="lt1"/>
+          </a:fontRef>
+        </p:style>
+        <p:txBody>
+          <a:bodyPr rtlCol="0" anchor="ctr"/>
+          <a:lstStyle/>
+          <a:p>
+            <a:pPr algn="ctr"/>
+          </a:p>
+        </p:txBody>
+      </p:sp>
+      <p:sp>
+        <p:nvSpPr>
+          <p:cNvPr id="8" name="TextBox 7"/>
+          <p:cNvSpPr txBox="1"/>
+          <p:nvPr/>
+        </p:nvSpPr>
+        <p:spPr>
+          <a:xfrm>
+            <a:off x="1828800" y="1691640"/>
+            <a:ext cx="9966960" cy="914400"/>
+          </a:xfrm>
+          <a:prstGeom prst="rect">
+            <a:avLst/>
+          </a:prstGeom>
+          <a:noFill/>
+        </p:spPr>
+        <p:txBody>
+          <a:bodyPr wrap="square" lIns="18288" rIns="18288" tIns="9144" bIns="9144" anchor="ctr">
+            <a:spAutoFit/>
+          </a:bodyPr>
+          <a:lstStyle/>
+          <a:p>
+            <a:pPr algn="l"/>
+            <a:r>
               <a:rPr sz="1800" b="1" i="0">
                 <a:solidFill>
                   <a:srgbClr val="5B3DF5"/>
@@ -5984,14 +6213,14 @@
       </p:sp>
       <p:sp>
         <p:nvSpPr>
-          <p:cNvPr id="8" name="TextBox 7"/>
-          <p:cNvSpPr txBox="1"/>
-          <p:nvPr/>
-        </p:nvSpPr>
-        <p:spPr>
-          <a:xfrm>
-            <a:off x="594360" y="2788920"/>
-            <a:ext cx="10972800" cy="566928"/>
+          <p:cNvPr id="9" name="TextBox 8"/>
+          <p:cNvSpPr txBox="1"/>
+          <p:nvPr/>
+        </p:nvSpPr>
+        <p:spPr>
+          <a:xfrm>
+            <a:off x="1828800" y="2834640"/>
+            <a:ext cx="4572000" cy="868680"/>
           </a:xfrm>
           <a:prstGeom prst="rect">
             <a:avLst/>
@@ -6019,14 +6248,14 @@
       </p:sp>
       <p:sp>
         <p:nvSpPr>
-          <p:cNvPr id="9" name="TextBox 8"/>
-          <p:cNvSpPr txBox="1"/>
-          <p:nvPr/>
-        </p:nvSpPr>
-        <p:spPr>
-          <a:xfrm>
-            <a:off x="594360" y="3447288"/>
-            <a:ext cx="10972800" cy="566928"/>
+          <p:cNvPr id="10" name="TextBox 9"/>
+          <p:cNvSpPr txBox="1"/>
+          <p:nvPr/>
+        </p:nvSpPr>
+        <p:spPr>
+          <a:xfrm>
+            <a:off x="7132320" y="2834640"/>
+            <a:ext cx="4572000" cy="868680"/>
           </a:xfrm>
           <a:prstGeom prst="rect">
             <a:avLst/>
@@ -6054,14 +6283,14 @@
       </p:sp>
       <p:sp>
         <p:nvSpPr>
-          <p:cNvPr id="10" name="TextBox 9"/>
-          <p:cNvSpPr txBox="1"/>
-          <p:nvPr/>
-        </p:nvSpPr>
-        <p:spPr>
-          <a:xfrm>
-            <a:off x="594360" y="4105656"/>
-            <a:ext cx="10972800" cy="566928"/>
+          <p:cNvPr id="11" name="TextBox 10"/>
+          <p:cNvSpPr txBox="1"/>
+          <p:nvPr/>
+        </p:nvSpPr>
+        <p:spPr>
+          <a:xfrm>
+            <a:off x="1828800" y="4160520"/>
+            <a:ext cx="4572000" cy="868680"/>
           </a:xfrm>
           <a:prstGeom prst="rect">
             <a:avLst/>
@@ -6089,14 +6318,14 @@
       </p:sp>
       <p:sp>
         <p:nvSpPr>
-          <p:cNvPr id="11" name="TextBox 10"/>
-          <p:cNvSpPr txBox="1"/>
-          <p:nvPr/>
-        </p:nvSpPr>
-        <p:spPr>
-          <a:xfrm>
-            <a:off x="594360" y="4764024"/>
-            <a:ext cx="10972800" cy="566928"/>
+          <p:cNvPr id="12" name="TextBox 11"/>
+          <p:cNvSpPr txBox="1"/>
+          <p:nvPr/>
+        </p:nvSpPr>
+        <p:spPr>
+          <a:xfrm>
+            <a:off x="7132320" y="4160520"/>
+            <a:ext cx="4572000" cy="868680"/>
           </a:xfrm>
           <a:prstGeom prst="rect">
             <a:avLst/>
@@ -6124,14 +6353,49 @@
       </p:sp>
       <p:sp>
         <p:nvSpPr>
-          <p:cNvPr id="12" name="TextBox 11"/>
-          <p:cNvSpPr txBox="1"/>
-          <p:nvPr/>
-        </p:nvSpPr>
-        <p:spPr>
-          <a:xfrm>
-            <a:off x="594360" y="5422392"/>
-            <a:ext cx="10972800" cy="566928"/>
+          <p:cNvPr id="13" name="TextBox 12"/>
+          <p:cNvSpPr txBox="1"/>
+          <p:nvPr/>
+        </p:nvSpPr>
+        <p:spPr>
+          <a:xfrm>
+            <a:off x="1828800" y="5486400"/>
+            <a:ext cx="4572000" cy="868680"/>
+          </a:xfrm>
+          <a:prstGeom prst="rect">
+            <a:avLst/>
+          </a:prstGeom>
+          <a:noFill/>
+        </p:spPr>
+        <p:txBody>
+          <a:bodyPr wrap="square" lIns="18288" rIns="18288" tIns="9144" bIns="9144" anchor="ctr">
+            <a:spAutoFit/>
+          </a:bodyPr>
+          <a:lstStyle/>
+          <a:p>
+            <a:pPr algn="l"/>
+            <a:r>
+              <a:rPr sz="1600" b="0" i="0">
+                <a:solidFill>
+                  <a:srgbClr val="1B1830"/>
+                </a:solidFill>
+                <a:latin typeface="Microsoft YaHei"/>
+              </a:rPr>
+              <a:t/>
+            </a:r>
+          </a:p>
+        </p:txBody>
+      </p:sp>
+      <p:sp>
+        <p:nvSpPr>
+          <p:cNvPr id="14" name="TextBox 13"/>
+          <p:cNvSpPr txBox="1"/>
+          <p:nvPr/>
+        </p:nvSpPr>
+        <p:spPr>
+          <a:xfrm>
+            <a:off x="7132320" y="5486400"/>
+            <a:ext cx="4572000" cy="868680"/>
           </a:xfrm>
           <a:prstGeom prst="rect">
             <a:avLst/>
@@ -6192,7 +6456,7 @@
         <p:spPr>
           <a:xfrm>
             <a:off x="0" y="0"/>
-            <a:ext cx="118872" cy="6858000"/>
+            <a:ext cx="1554480" cy="6858000"/>
           </a:xfrm>
           <a:prstGeom prst="rect">
             <a:avLst/>
@@ -6229,119 +6493,14 @@
       </p:sp>
       <p:sp>
         <p:nvSpPr>
-          <p:cNvPr id="3" name="TextBox 2"/>
-          <p:cNvSpPr txBox="1"/>
-          <p:nvPr/>
-        </p:nvSpPr>
-        <p:spPr>
-          <a:xfrm>
-            <a:off x="457200" y="6419088"/>
-            <a:ext cx="3657600" cy="274320"/>
-          </a:xfrm>
-          <a:prstGeom prst="rect">
-            <a:avLst/>
-          </a:prstGeom>
-          <a:noFill/>
-        </p:spPr>
-        <p:txBody>
-          <a:bodyPr wrap="none">
-            <a:spAutoFit/>
-          </a:bodyPr>
-          <a:lstStyle/>
-          <a:p>
-            <a:pPr algn="l"/>
-            <a:r>
-              <a:rPr sz="900" b="0">
-                <a:solidFill>
-                  <a:srgbClr val="6E6A8A"/>
-                </a:solidFill>
-                <a:latin typeface="Microsoft YaHei"/>
-              </a:rPr>
-              <a:t>LESSONFORGE 微课</a:t>
-            </a:r>
-          </a:p>
-        </p:txBody>
-      </p:sp>
-      <p:sp>
-        <p:nvSpPr>
-          <p:cNvPr id="4" name="TextBox 3"/>
-          <p:cNvSpPr txBox="1"/>
-          <p:nvPr/>
-        </p:nvSpPr>
-        <p:spPr>
-          <a:xfrm>
-            <a:off x="10607040" y="6419088"/>
-            <a:ext cx="1097280" cy="274320"/>
-          </a:xfrm>
-          <a:prstGeom prst="rect">
-            <a:avLst/>
-          </a:prstGeom>
-          <a:noFill/>
-        </p:spPr>
-        <p:txBody>
-          <a:bodyPr wrap="none">
-            <a:spAutoFit/>
-          </a:bodyPr>
-          <a:lstStyle/>
-          <a:p>
-            <a:pPr algn="r"/>
-            <a:r>
-              <a:rPr sz="1000" b="1">
-                <a:solidFill>
-                  <a:srgbClr val="6E6A8A"/>
-                </a:solidFill>
-                <a:latin typeface="Microsoft YaHei"/>
-              </a:rPr>
-              <a:t>03</a:t>
-            </a:r>
-          </a:p>
-        </p:txBody>
-      </p:sp>
-      <p:sp>
-        <p:nvSpPr>
-          <p:cNvPr id="5" name="TextBox 4"/>
-          <p:cNvSpPr txBox="1"/>
-          <p:nvPr/>
-        </p:nvSpPr>
-        <p:spPr>
-          <a:xfrm>
-            <a:off x="548640" y="457200"/>
-            <a:ext cx="11064240" cy="777240"/>
-          </a:xfrm>
-          <a:prstGeom prst="rect">
-            <a:avLst/>
-          </a:prstGeom>
-          <a:noFill/>
-        </p:spPr>
-        <p:txBody>
-          <a:bodyPr wrap="square" lIns="18288" rIns="18288" tIns="9144" bIns="9144" anchor="ctr">
-            <a:spAutoFit/>
-          </a:bodyPr>
-          <a:lstStyle/>
-          <a:p>
-            <a:pPr algn="l"/>
-            <a:r>
-              <a:rPr sz="2800" b="1" i="0">
-                <a:solidFill>
-                  <a:srgbClr val="5B3DF5"/>
-                </a:solidFill>
-                <a:latin typeface="Microsoft YaHei"/>
-              </a:rPr>
-              <a:t/>
-            </a:r>
-          </a:p>
-        </p:txBody>
-      </p:sp>
-      <p:sp>
-        <p:nvSpPr>
-          <p:cNvPr id="6" name="Rectangle 5"/>
+          <p:cNvPr id="3" name="Rectangle 2"/>
           <p:cNvSpPr/>
           <p:nvPr/>
         </p:nvSpPr>
         <p:spPr>
           <a:xfrm>
-            <a:off x="566928" y="1298448"/>
-            <a:ext cx="1234440" cy="82296"/>
+            <a:off x="1554480" y="0"/>
+            <a:ext cx="64008" cy="6858000"/>
           </a:xfrm>
           <a:prstGeom prst="rect">
             <a:avLst/>
@@ -6378,14 +6537,84 @@
       </p:sp>
       <p:sp>
         <p:nvSpPr>
-          <p:cNvPr id="7" name="TextBox 6"/>
-          <p:cNvSpPr txBox="1"/>
-          <p:nvPr/>
-        </p:nvSpPr>
-        <p:spPr>
-          <a:xfrm>
-            <a:off x="594360" y="1737360"/>
-            <a:ext cx="10972800" cy="640080"/>
+          <p:cNvPr id="4" name="TextBox 3"/>
+          <p:cNvSpPr txBox="1"/>
+          <p:nvPr/>
+        </p:nvSpPr>
+        <p:spPr>
+          <a:xfrm>
+            <a:off x="411480" y="6419088"/>
+            <a:ext cx="1097280" cy="274320"/>
+          </a:xfrm>
+          <a:prstGeom prst="rect">
+            <a:avLst/>
+          </a:prstGeom>
+          <a:noFill/>
+        </p:spPr>
+        <p:txBody>
+          <a:bodyPr wrap="none">
+            <a:spAutoFit/>
+          </a:bodyPr>
+          <a:lstStyle/>
+          <a:p>
+            <a:pPr algn="l"/>
+            <a:r>
+              <a:rPr sz="900" b="0">
+                <a:solidFill>
+                  <a:srgbClr val="FFFFFF"/>
+                </a:solidFill>
+                <a:latin typeface="Microsoft YaHei"/>
+              </a:rPr>
+              <a:t>LESSONFORGE 微课</a:t>
+            </a:r>
+          </a:p>
+        </p:txBody>
+      </p:sp>
+      <p:sp>
+        <p:nvSpPr>
+          <p:cNvPr id="5" name="TextBox 4"/>
+          <p:cNvSpPr txBox="1"/>
+          <p:nvPr/>
+        </p:nvSpPr>
+        <p:spPr>
+          <a:xfrm>
+            <a:off x="10607040" y="6419088"/>
+            <a:ext cx="1097280" cy="274320"/>
+          </a:xfrm>
+          <a:prstGeom prst="rect">
+            <a:avLst/>
+          </a:prstGeom>
+          <a:noFill/>
+        </p:spPr>
+        <p:txBody>
+          <a:bodyPr wrap="none">
+            <a:spAutoFit/>
+          </a:bodyPr>
+          <a:lstStyle/>
+          <a:p>
+            <a:pPr algn="r"/>
+            <a:r>
+              <a:rPr sz="1000" b="1">
+                <a:solidFill>
+                  <a:srgbClr val="6E6A8A"/>
+                </a:solidFill>
+                <a:latin typeface="Microsoft YaHei"/>
+              </a:rPr>
+              <a:t>03</a:t>
+            </a:r>
+          </a:p>
+        </p:txBody>
+      </p:sp>
+      <p:sp>
+        <p:nvSpPr>
+          <p:cNvPr id="6" name="TextBox 5"/>
+          <p:cNvSpPr txBox="1"/>
+          <p:nvPr/>
+        </p:nvSpPr>
+        <p:spPr>
+          <a:xfrm>
+            <a:off x="1828800" y="502920"/>
+            <a:ext cx="9966960" cy="777240"/>
           </a:xfrm>
           <a:prstGeom prst="rect">
             <a:avLst/>
@@ -6400,7 +6629,7 @@
           <a:p>
             <a:pPr algn="l"/>
             <a:r>
-              <a:rPr sz="1800" b="1" i="0">
+              <a:rPr sz="2800" b="1" i="0">
                 <a:solidFill>
                   <a:srgbClr val="5B3DF5"/>
                 </a:solidFill>
@@ -6413,14 +6642,58 @@
       </p:sp>
       <p:sp>
         <p:nvSpPr>
+          <p:cNvPr id="7" name="Rectangle 6"/>
+          <p:cNvSpPr/>
+          <p:nvPr/>
+        </p:nvSpPr>
+        <p:spPr>
+          <a:xfrm>
+            <a:off x="1856231" y="1335024"/>
+            <a:ext cx="1234440" cy="82296"/>
+          </a:xfrm>
+          <a:prstGeom prst="rect">
+            <a:avLst/>
+          </a:prstGeom>
+          <a:solidFill>
+            <a:srgbClr val="5B3DF5"/>
+          </a:solidFill>
+          <a:ln>
+            <a:noFill/>
+          </a:ln>
+          <a:effectLst/>
+        </p:spPr>
+        <p:style>
+          <a:lnRef idx="1">
+            <a:schemeClr val="accent1"/>
+          </a:lnRef>
+          <a:fillRef idx="3">
+            <a:schemeClr val="accent1"/>
+          </a:fillRef>
+          <a:effectRef idx="2">
+            <a:schemeClr val="accent1"/>
+          </a:effectRef>
+          <a:fontRef idx="minor">
+            <a:schemeClr val="lt1"/>
+          </a:fontRef>
+        </p:style>
+        <p:txBody>
+          <a:bodyPr rtlCol="0" anchor="ctr"/>
+          <a:lstStyle/>
+          <a:p>
+            <a:pPr algn="ctr"/>
+          </a:p>
+        </p:txBody>
+      </p:sp>
+      <p:sp>
+        <p:nvSpPr>
           <p:cNvPr id="8" name="TextBox 7"/>
           <p:cNvSpPr txBox="1"/>
           <p:nvPr/>
         </p:nvSpPr>
         <p:spPr>
           <a:xfrm>
-            <a:off x="594360" y="2560320"/>
-            <a:ext cx="10972800" cy="731520"/>
+            <a:off x="1828800" y="1783080"/>
+            <a:ext cx="4572000" cy="1097280"/>
           </a:xfrm>
           <a:prstGeom prst="rect">
             <a:avLst/>
@@ -6454,8 +6727,8 @@
         </p:nvSpPr>
         <p:spPr>
           <a:xfrm>
-            <a:off x="594360" y="3429000"/>
-            <a:ext cx="10972800" cy="731520"/>
+            <a:off x="7132320" y="1783080"/>
+            <a:ext cx="4572000" cy="1097280"/>
           </a:xfrm>
           <a:prstGeom prst="rect">
             <a:avLst/>
@@ -6489,8 +6762,8 @@
         </p:nvSpPr>
         <p:spPr>
           <a:xfrm>
-            <a:off x="594360" y="4297680"/>
-            <a:ext cx="10972800" cy="731520"/>
+            <a:off x="1828800" y="3337560"/>
+            <a:ext cx="4572000" cy="1097280"/>
           </a:xfrm>
           <a:prstGeom prst="rect">
             <a:avLst/>
@@ -6524,8 +6797,78 @@
         </p:nvSpPr>
         <p:spPr>
           <a:xfrm>
-            <a:off x="594360" y="5166360"/>
-            <a:ext cx="10972800" cy="731520"/>
+            <a:off x="7132320" y="3337560"/>
+            <a:ext cx="4572000" cy="1097280"/>
+          </a:xfrm>
+          <a:prstGeom prst="rect">
+            <a:avLst/>
+          </a:prstGeom>
+          <a:noFill/>
+        </p:spPr>
+        <p:txBody>
+          <a:bodyPr wrap="square" lIns="18288" rIns="18288" tIns="9144" bIns="9144" anchor="ctr">
+            <a:spAutoFit/>
+          </a:bodyPr>
+          <a:lstStyle/>
+          <a:p>
+            <a:pPr algn="l"/>
+            <a:r>
+              <a:rPr sz="1600" b="0" i="0">
+                <a:solidFill>
+                  <a:srgbClr val="1B1830"/>
+                </a:solidFill>
+                <a:latin typeface="Microsoft YaHei"/>
+              </a:rPr>
+              <a:t/>
+            </a:r>
+          </a:p>
+        </p:txBody>
+      </p:sp>
+      <p:sp>
+        <p:nvSpPr>
+          <p:cNvPr id="12" name="TextBox 11"/>
+          <p:cNvSpPr txBox="1"/>
+          <p:nvPr/>
+        </p:nvSpPr>
+        <p:spPr>
+          <a:xfrm>
+            <a:off x="1828800" y="4892040"/>
+            <a:ext cx="4572000" cy="1097280"/>
+          </a:xfrm>
+          <a:prstGeom prst="rect">
+            <a:avLst/>
+          </a:prstGeom>
+          <a:noFill/>
+        </p:spPr>
+        <p:txBody>
+          <a:bodyPr wrap="square" lIns="18288" rIns="18288" tIns="9144" bIns="9144" anchor="ctr">
+            <a:spAutoFit/>
+          </a:bodyPr>
+          <a:lstStyle/>
+          <a:p>
+            <a:pPr algn="l"/>
+            <a:r>
+              <a:rPr sz="1600" b="0" i="0">
+                <a:solidFill>
+                  <a:srgbClr val="1B1830"/>
+                </a:solidFill>
+                <a:latin typeface="Microsoft YaHei"/>
+              </a:rPr>
+              <a:t/>
+            </a:r>
+          </a:p>
+        </p:txBody>
+      </p:sp>
+      <p:sp>
+        <p:nvSpPr>
+          <p:cNvPr id="13" name="TextBox 12"/>
+          <p:cNvSpPr txBox="1"/>
+          <p:nvPr/>
+        </p:nvSpPr>
+        <p:spPr>
+          <a:xfrm>
+            <a:off x="7132320" y="4892040"/>
+            <a:ext cx="4572000" cy="1097280"/>
           </a:xfrm>
           <a:prstGeom prst="rect">
             <a:avLst/>
@@ -6586,7 +6929,7 @@
         <p:spPr>
           <a:xfrm>
             <a:off x="0" y="0"/>
-            <a:ext cx="118872" cy="6858000"/>
+            <a:ext cx="1554480" cy="6858000"/>
           </a:xfrm>
           <a:prstGeom prst="rect">
             <a:avLst/>
@@ -6623,119 +6966,14 @@
       </p:sp>
       <p:sp>
         <p:nvSpPr>
-          <p:cNvPr id="3" name="TextBox 2"/>
-          <p:cNvSpPr txBox="1"/>
-          <p:nvPr/>
-        </p:nvSpPr>
-        <p:spPr>
-          <a:xfrm>
-            <a:off x="457200" y="6419088"/>
-            <a:ext cx="3657600" cy="274320"/>
-          </a:xfrm>
-          <a:prstGeom prst="rect">
-            <a:avLst/>
-          </a:prstGeom>
-          <a:noFill/>
-        </p:spPr>
-        <p:txBody>
-          <a:bodyPr wrap="none">
-            <a:spAutoFit/>
-          </a:bodyPr>
-          <a:lstStyle/>
-          <a:p>
-            <a:pPr algn="l"/>
-            <a:r>
-              <a:rPr sz="900" b="0">
-                <a:solidFill>
-                  <a:srgbClr val="6E6A8A"/>
-                </a:solidFill>
-                <a:latin typeface="Microsoft YaHei"/>
-              </a:rPr>
-              <a:t>LESSONFORGE 微课</a:t>
-            </a:r>
-          </a:p>
-        </p:txBody>
-      </p:sp>
-      <p:sp>
-        <p:nvSpPr>
-          <p:cNvPr id="4" name="TextBox 3"/>
-          <p:cNvSpPr txBox="1"/>
-          <p:nvPr/>
-        </p:nvSpPr>
-        <p:spPr>
-          <a:xfrm>
-            <a:off x="10607040" y="6419088"/>
-            <a:ext cx="1097280" cy="274320"/>
-          </a:xfrm>
-          <a:prstGeom prst="rect">
-            <a:avLst/>
-          </a:prstGeom>
-          <a:noFill/>
-        </p:spPr>
-        <p:txBody>
-          <a:bodyPr wrap="none">
-            <a:spAutoFit/>
-          </a:bodyPr>
-          <a:lstStyle/>
-          <a:p>
-            <a:pPr algn="r"/>
-            <a:r>
-              <a:rPr sz="1000" b="1">
-                <a:solidFill>
-                  <a:srgbClr val="6E6A8A"/>
-                </a:solidFill>
-                <a:latin typeface="Microsoft YaHei"/>
-              </a:rPr>
-              <a:t>04</a:t>
-            </a:r>
-          </a:p>
-        </p:txBody>
-      </p:sp>
-      <p:sp>
-        <p:nvSpPr>
-          <p:cNvPr id="5" name="TextBox 4"/>
-          <p:cNvSpPr txBox="1"/>
-          <p:nvPr/>
-        </p:nvSpPr>
-        <p:spPr>
-          <a:xfrm>
-            <a:off x="548640" y="457200"/>
-            <a:ext cx="11064240" cy="777240"/>
-          </a:xfrm>
-          <a:prstGeom prst="rect">
-            <a:avLst/>
-          </a:prstGeom>
-          <a:noFill/>
-        </p:spPr>
-        <p:txBody>
-          <a:bodyPr wrap="square" lIns="18288" rIns="18288" tIns="9144" bIns="9144" anchor="ctr">
-            <a:spAutoFit/>
-          </a:bodyPr>
-          <a:lstStyle/>
-          <a:p>
-            <a:pPr algn="l"/>
-            <a:r>
-              <a:rPr sz="2800" b="1" i="0">
-                <a:solidFill>
-                  <a:srgbClr val="5B3DF5"/>
-                </a:solidFill>
-                <a:latin typeface="Microsoft YaHei"/>
-              </a:rPr>
-              <a:t/>
-            </a:r>
-          </a:p>
-        </p:txBody>
-      </p:sp>
-      <p:sp>
-        <p:nvSpPr>
-          <p:cNvPr id="6" name="Rectangle 5"/>
+          <p:cNvPr id="3" name="Rectangle 2"/>
           <p:cNvSpPr/>
           <p:nvPr/>
         </p:nvSpPr>
         <p:spPr>
           <a:xfrm>
-            <a:off x="566928" y="1298448"/>
-            <a:ext cx="1234440" cy="82296"/>
+            <a:off x="1554480" y="0"/>
+            <a:ext cx="64008" cy="6858000"/>
           </a:xfrm>
           <a:prstGeom prst="rect">
             <a:avLst/>
@@ -6772,14 +7010,84 @@
       </p:sp>
       <p:sp>
         <p:nvSpPr>
-          <p:cNvPr id="7" name="TextBox 6"/>
-          <p:cNvSpPr txBox="1"/>
-          <p:nvPr/>
-        </p:nvSpPr>
-        <p:spPr>
-          <a:xfrm>
-            <a:off x="594360" y="1737360"/>
-            <a:ext cx="10972800" cy="640080"/>
+          <p:cNvPr id="4" name="TextBox 3"/>
+          <p:cNvSpPr txBox="1"/>
+          <p:nvPr/>
+        </p:nvSpPr>
+        <p:spPr>
+          <a:xfrm>
+            <a:off x="411480" y="6419088"/>
+            <a:ext cx="1097280" cy="274320"/>
+          </a:xfrm>
+          <a:prstGeom prst="rect">
+            <a:avLst/>
+          </a:prstGeom>
+          <a:noFill/>
+        </p:spPr>
+        <p:txBody>
+          <a:bodyPr wrap="none">
+            <a:spAutoFit/>
+          </a:bodyPr>
+          <a:lstStyle/>
+          <a:p>
+            <a:pPr algn="l"/>
+            <a:r>
+              <a:rPr sz="900" b="0">
+                <a:solidFill>
+                  <a:srgbClr val="FFFFFF"/>
+                </a:solidFill>
+                <a:latin typeface="Microsoft YaHei"/>
+              </a:rPr>
+              <a:t>LESSONFORGE 微课</a:t>
+            </a:r>
+          </a:p>
+        </p:txBody>
+      </p:sp>
+      <p:sp>
+        <p:nvSpPr>
+          <p:cNvPr id="5" name="TextBox 4"/>
+          <p:cNvSpPr txBox="1"/>
+          <p:nvPr/>
+        </p:nvSpPr>
+        <p:spPr>
+          <a:xfrm>
+            <a:off x="10607040" y="6419088"/>
+            <a:ext cx="1097280" cy="274320"/>
+          </a:xfrm>
+          <a:prstGeom prst="rect">
+            <a:avLst/>
+          </a:prstGeom>
+          <a:noFill/>
+        </p:spPr>
+        <p:txBody>
+          <a:bodyPr wrap="none">
+            <a:spAutoFit/>
+          </a:bodyPr>
+          <a:lstStyle/>
+          <a:p>
+            <a:pPr algn="r"/>
+            <a:r>
+              <a:rPr sz="1000" b="1">
+                <a:solidFill>
+                  <a:srgbClr val="6E6A8A"/>
+                </a:solidFill>
+                <a:latin typeface="Microsoft YaHei"/>
+              </a:rPr>
+              <a:t>04</a:t>
+            </a:r>
+          </a:p>
+        </p:txBody>
+      </p:sp>
+      <p:sp>
+        <p:nvSpPr>
+          <p:cNvPr id="6" name="TextBox 5"/>
+          <p:cNvSpPr txBox="1"/>
+          <p:nvPr/>
+        </p:nvSpPr>
+        <p:spPr>
+          <a:xfrm>
+            <a:off x="1828800" y="502920"/>
+            <a:ext cx="9966960" cy="777240"/>
           </a:xfrm>
           <a:prstGeom prst="rect">
             <a:avLst/>
@@ -6794,7 +7102,7 @@
           <a:p>
             <a:pPr algn="l"/>
             <a:r>
-              <a:rPr sz="1800" b="1" i="0">
+              <a:rPr sz="2800" b="1" i="0">
                 <a:solidFill>
                   <a:srgbClr val="5B3DF5"/>
                 </a:solidFill>
@@ -6807,14 +7115,58 @@
       </p:sp>
       <p:sp>
         <p:nvSpPr>
+          <p:cNvPr id="7" name="Rectangle 6"/>
+          <p:cNvSpPr/>
+          <p:nvPr/>
+        </p:nvSpPr>
+        <p:spPr>
+          <a:xfrm>
+            <a:off x="1856231" y="1335024"/>
+            <a:ext cx="1234440" cy="82296"/>
+          </a:xfrm>
+          <a:prstGeom prst="rect">
+            <a:avLst/>
+          </a:prstGeom>
+          <a:solidFill>
+            <a:srgbClr val="5B3DF5"/>
+          </a:solidFill>
+          <a:ln>
+            <a:noFill/>
+          </a:ln>
+          <a:effectLst/>
+        </p:spPr>
+        <p:style>
+          <a:lnRef idx="1">
+            <a:schemeClr val="accent1"/>
+          </a:lnRef>
+          <a:fillRef idx="3">
+            <a:schemeClr val="accent1"/>
+          </a:fillRef>
+          <a:effectRef idx="2">
+            <a:schemeClr val="accent1"/>
+          </a:effectRef>
+          <a:fontRef idx="minor">
+            <a:schemeClr val="lt1"/>
+          </a:fontRef>
+        </p:style>
+        <p:txBody>
+          <a:bodyPr rtlCol="0" anchor="ctr"/>
+          <a:lstStyle/>
+          <a:p>
+            <a:pPr algn="ctr"/>
+          </a:p>
+        </p:txBody>
+      </p:sp>
+      <p:sp>
+        <p:nvSpPr>
           <p:cNvPr id="8" name="TextBox 7"/>
           <p:cNvSpPr txBox="1"/>
           <p:nvPr/>
         </p:nvSpPr>
         <p:spPr>
           <a:xfrm>
-            <a:off x="594360" y="2606040"/>
-            <a:ext cx="5394960" cy="685800"/>
+            <a:off x="1828800" y="1783080"/>
+            <a:ext cx="4572000" cy="1097280"/>
           </a:xfrm>
           <a:prstGeom prst="rect">
             <a:avLst/>
@@ -6848,8 +7200,8 @@
         </p:nvSpPr>
         <p:spPr>
           <a:xfrm>
-            <a:off x="6263640" y="2606040"/>
-            <a:ext cx="5394960" cy="685800"/>
+            <a:off x="7132320" y="1783080"/>
+            <a:ext cx="4572000" cy="1097280"/>
           </a:xfrm>
           <a:prstGeom prst="rect">
             <a:avLst/>
@@ -6883,8 +7235,8 @@
         </p:nvSpPr>
         <p:spPr>
           <a:xfrm>
-            <a:off x="594360" y="3474720"/>
-            <a:ext cx="5394960" cy="685800"/>
+            <a:off x="1828800" y="3337560"/>
+            <a:ext cx="4572000" cy="1097280"/>
           </a:xfrm>
           <a:prstGeom prst="rect">
             <a:avLst/>
@@ -6918,8 +7270,78 @@
         </p:nvSpPr>
         <p:spPr>
           <a:xfrm>
-            <a:off x="6263640" y="3474720"/>
-            <a:ext cx="5394960" cy="685800"/>
+            <a:off x="7132320" y="3337560"/>
+            <a:ext cx="4572000" cy="1097280"/>
+          </a:xfrm>
+          <a:prstGeom prst="rect">
+            <a:avLst/>
+          </a:prstGeom>
+          <a:noFill/>
+        </p:spPr>
+        <p:txBody>
+          <a:bodyPr wrap="square" lIns="18288" rIns="18288" tIns="9144" bIns="9144" anchor="ctr">
+            <a:spAutoFit/>
+          </a:bodyPr>
+          <a:lstStyle/>
+          <a:p>
+            <a:pPr algn="l"/>
+            <a:r>
+              <a:rPr sz="1600" b="0" i="0">
+                <a:solidFill>
+                  <a:srgbClr val="1B1830"/>
+                </a:solidFill>
+                <a:latin typeface="Microsoft YaHei"/>
+              </a:rPr>
+              <a:t/>
+            </a:r>
+          </a:p>
+        </p:txBody>
+      </p:sp>
+      <p:sp>
+        <p:nvSpPr>
+          <p:cNvPr id="12" name="TextBox 11"/>
+          <p:cNvSpPr txBox="1"/>
+          <p:nvPr/>
+        </p:nvSpPr>
+        <p:spPr>
+          <a:xfrm>
+            <a:off x="1828800" y="4892040"/>
+            <a:ext cx="4572000" cy="1097280"/>
+          </a:xfrm>
+          <a:prstGeom prst="rect">
+            <a:avLst/>
+          </a:prstGeom>
+          <a:noFill/>
+        </p:spPr>
+        <p:txBody>
+          <a:bodyPr wrap="square" lIns="18288" rIns="18288" tIns="9144" bIns="9144" anchor="ctr">
+            <a:spAutoFit/>
+          </a:bodyPr>
+          <a:lstStyle/>
+          <a:p>
+            <a:pPr algn="l"/>
+            <a:r>
+              <a:rPr sz="1600" b="0" i="0">
+                <a:solidFill>
+                  <a:srgbClr val="1B1830"/>
+                </a:solidFill>
+                <a:latin typeface="Microsoft YaHei"/>
+              </a:rPr>
+              <a:t/>
+            </a:r>
+          </a:p>
+        </p:txBody>
+      </p:sp>
+      <p:sp>
+        <p:nvSpPr>
+          <p:cNvPr id="13" name="TextBox 12"/>
+          <p:cNvSpPr txBox="1"/>
+          <p:nvPr/>
+        </p:nvSpPr>
+        <p:spPr>
+          <a:xfrm>
+            <a:off x="7132320" y="4892040"/>
+            <a:ext cx="4572000" cy="1097280"/>
           </a:xfrm>
           <a:prstGeom prst="rect">
             <a:avLst/>
@@ -6980,7 +7402,7 @@
         <p:spPr>
           <a:xfrm>
             <a:off x="0" y="0"/>
-            <a:ext cx="118872" cy="6858000"/>
+            <a:ext cx="1554480" cy="6858000"/>
           </a:xfrm>
           <a:prstGeom prst="rect">
             <a:avLst/>
@@ -7017,119 +7439,14 @@
       </p:sp>
       <p:sp>
         <p:nvSpPr>
-          <p:cNvPr id="3" name="TextBox 2"/>
-          <p:cNvSpPr txBox="1"/>
-          <p:nvPr/>
-        </p:nvSpPr>
-        <p:spPr>
-          <a:xfrm>
-            <a:off x="457200" y="6419088"/>
-            <a:ext cx="3657600" cy="274320"/>
-          </a:xfrm>
-          <a:prstGeom prst="rect">
-            <a:avLst/>
-          </a:prstGeom>
-          <a:noFill/>
-        </p:spPr>
-        <p:txBody>
-          <a:bodyPr wrap="none">
-            <a:spAutoFit/>
-          </a:bodyPr>
-          <a:lstStyle/>
-          <a:p>
-            <a:pPr algn="l"/>
-            <a:r>
-              <a:rPr sz="900" b="0">
-                <a:solidFill>
-                  <a:srgbClr val="6E6A8A"/>
-                </a:solidFill>
-                <a:latin typeface="Microsoft YaHei"/>
-              </a:rPr>
-              <a:t>LESSONFORGE 微课</a:t>
-            </a:r>
-          </a:p>
-        </p:txBody>
-      </p:sp>
-      <p:sp>
-        <p:nvSpPr>
-          <p:cNvPr id="4" name="TextBox 3"/>
-          <p:cNvSpPr txBox="1"/>
-          <p:nvPr/>
-        </p:nvSpPr>
-        <p:spPr>
-          <a:xfrm>
-            <a:off x="10607040" y="6419088"/>
-            <a:ext cx="1097280" cy="274320"/>
-          </a:xfrm>
-          <a:prstGeom prst="rect">
-            <a:avLst/>
-          </a:prstGeom>
-          <a:noFill/>
-        </p:spPr>
-        <p:txBody>
-          <a:bodyPr wrap="none">
-            <a:spAutoFit/>
-          </a:bodyPr>
-          <a:lstStyle/>
-          <a:p>
-            <a:pPr algn="r"/>
-            <a:r>
-              <a:rPr sz="1000" b="1">
-                <a:solidFill>
-                  <a:srgbClr val="6E6A8A"/>
-                </a:solidFill>
-                <a:latin typeface="Microsoft YaHei"/>
-              </a:rPr>
-              <a:t>05</a:t>
-            </a:r>
-          </a:p>
-        </p:txBody>
-      </p:sp>
-      <p:sp>
-        <p:nvSpPr>
-          <p:cNvPr id="5" name="TextBox 4"/>
-          <p:cNvSpPr txBox="1"/>
-          <p:nvPr/>
-        </p:nvSpPr>
-        <p:spPr>
-          <a:xfrm>
-            <a:off x="548640" y="457200"/>
-            <a:ext cx="11064240" cy="777240"/>
-          </a:xfrm>
-          <a:prstGeom prst="rect">
-            <a:avLst/>
-          </a:prstGeom>
-          <a:noFill/>
-        </p:spPr>
-        <p:txBody>
-          <a:bodyPr wrap="square" lIns="18288" rIns="18288" tIns="9144" bIns="9144" anchor="ctr">
-            <a:spAutoFit/>
-          </a:bodyPr>
-          <a:lstStyle/>
-          <a:p>
-            <a:pPr algn="l"/>
-            <a:r>
-              <a:rPr sz="2800" b="1" i="0">
-                <a:solidFill>
-                  <a:srgbClr val="5B3DF5"/>
-                </a:solidFill>
-                <a:latin typeface="Microsoft YaHei"/>
-              </a:rPr>
-              <a:t/>
-            </a:r>
-          </a:p>
-        </p:txBody>
-      </p:sp>
-      <p:sp>
-        <p:nvSpPr>
-          <p:cNvPr id="6" name="Rectangle 5"/>
+          <p:cNvPr id="3" name="Rectangle 2"/>
           <p:cNvSpPr/>
           <p:nvPr/>
         </p:nvSpPr>
         <p:spPr>
           <a:xfrm>
-            <a:off x="566928" y="1298448"/>
-            <a:ext cx="1234440" cy="82296"/>
+            <a:off x="1554480" y="0"/>
+            <a:ext cx="64008" cy="6858000"/>
           </a:xfrm>
           <a:prstGeom prst="rect">
             <a:avLst/>
@@ -7166,14 +7483,84 @@
       </p:sp>
       <p:sp>
         <p:nvSpPr>
-          <p:cNvPr id="7" name="TextBox 6"/>
-          <p:cNvSpPr txBox="1"/>
-          <p:nvPr/>
-        </p:nvSpPr>
-        <p:spPr>
-          <a:xfrm>
-            <a:off x="594360" y="1645920"/>
-            <a:ext cx="10972800" cy="914400"/>
+          <p:cNvPr id="4" name="TextBox 3"/>
+          <p:cNvSpPr txBox="1"/>
+          <p:nvPr/>
+        </p:nvSpPr>
+        <p:spPr>
+          <a:xfrm>
+            <a:off x="411480" y="6419088"/>
+            <a:ext cx="1097280" cy="274320"/>
+          </a:xfrm>
+          <a:prstGeom prst="rect">
+            <a:avLst/>
+          </a:prstGeom>
+          <a:noFill/>
+        </p:spPr>
+        <p:txBody>
+          <a:bodyPr wrap="none">
+            <a:spAutoFit/>
+          </a:bodyPr>
+          <a:lstStyle/>
+          <a:p>
+            <a:pPr algn="l"/>
+            <a:r>
+              <a:rPr sz="900" b="0">
+                <a:solidFill>
+                  <a:srgbClr val="FFFFFF"/>
+                </a:solidFill>
+                <a:latin typeface="Microsoft YaHei"/>
+              </a:rPr>
+              <a:t>LESSONFORGE 微课</a:t>
+            </a:r>
+          </a:p>
+        </p:txBody>
+      </p:sp>
+      <p:sp>
+        <p:nvSpPr>
+          <p:cNvPr id="5" name="TextBox 4"/>
+          <p:cNvSpPr txBox="1"/>
+          <p:nvPr/>
+        </p:nvSpPr>
+        <p:spPr>
+          <a:xfrm>
+            <a:off x="10607040" y="6419088"/>
+            <a:ext cx="1097280" cy="274320"/>
+          </a:xfrm>
+          <a:prstGeom prst="rect">
+            <a:avLst/>
+          </a:prstGeom>
+          <a:noFill/>
+        </p:spPr>
+        <p:txBody>
+          <a:bodyPr wrap="none">
+            <a:spAutoFit/>
+          </a:bodyPr>
+          <a:lstStyle/>
+          <a:p>
+            <a:pPr algn="r"/>
+            <a:r>
+              <a:rPr sz="1000" b="1">
+                <a:solidFill>
+                  <a:srgbClr val="6E6A8A"/>
+                </a:solidFill>
+                <a:latin typeface="Microsoft YaHei"/>
+              </a:rPr>
+              <a:t>05</a:t>
+            </a:r>
+          </a:p>
+        </p:txBody>
+      </p:sp>
+      <p:sp>
+        <p:nvSpPr>
+          <p:cNvPr id="6" name="TextBox 5"/>
+          <p:cNvSpPr txBox="1"/>
+          <p:nvPr/>
+        </p:nvSpPr>
+        <p:spPr>
+          <a:xfrm>
+            <a:off x="1828800" y="502920"/>
+            <a:ext cx="9966960" cy="777240"/>
           </a:xfrm>
           <a:prstGeom prst="rect">
             <a:avLst/>
@@ -7188,6 +7575,85 @@
           <a:p>
             <a:pPr algn="l"/>
             <a:r>
+              <a:rPr sz="2800" b="1" i="0">
+                <a:solidFill>
+                  <a:srgbClr val="5B3DF5"/>
+                </a:solidFill>
+                <a:latin typeface="Microsoft YaHei"/>
+              </a:rPr>
+              <a:t/>
+            </a:r>
+          </a:p>
+        </p:txBody>
+      </p:sp>
+      <p:sp>
+        <p:nvSpPr>
+          <p:cNvPr id="7" name="Rectangle 6"/>
+          <p:cNvSpPr/>
+          <p:nvPr/>
+        </p:nvSpPr>
+        <p:spPr>
+          <a:xfrm>
+            <a:off x="1856231" y="1335024"/>
+            <a:ext cx="1234440" cy="82296"/>
+          </a:xfrm>
+          <a:prstGeom prst="rect">
+            <a:avLst/>
+          </a:prstGeom>
+          <a:solidFill>
+            <a:srgbClr val="5B3DF5"/>
+          </a:solidFill>
+          <a:ln>
+            <a:noFill/>
+          </a:ln>
+          <a:effectLst/>
+        </p:spPr>
+        <p:style>
+          <a:lnRef idx="1">
+            <a:schemeClr val="accent1"/>
+          </a:lnRef>
+          <a:fillRef idx="3">
+            <a:schemeClr val="accent1"/>
+          </a:fillRef>
+          <a:effectRef idx="2">
+            <a:schemeClr val="accent1"/>
+          </a:effectRef>
+          <a:fontRef idx="minor">
+            <a:schemeClr val="lt1"/>
+          </a:fontRef>
+        </p:style>
+        <p:txBody>
+          <a:bodyPr rtlCol="0" anchor="ctr"/>
+          <a:lstStyle/>
+          <a:p>
+            <a:pPr algn="ctr"/>
+          </a:p>
+        </p:txBody>
+      </p:sp>
+      <p:sp>
+        <p:nvSpPr>
+          <p:cNvPr id="8" name="TextBox 7"/>
+          <p:cNvSpPr txBox="1"/>
+          <p:nvPr/>
+        </p:nvSpPr>
+        <p:spPr>
+          <a:xfrm>
+            <a:off x="1828800" y="1691640"/>
+            <a:ext cx="9966960" cy="868680"/>
+          </a:xfrm>
+          <a:prstGeom prst="rect">
+            <a:avLst/>
+          </a:prstGeom>
+          <a:noFill/>
+        </p:spPr>
+        <p:txBody>
+          <a:bodyPr wrap="square" lIns="18288" rIns="18288" tIns="9144" bIns="9144" anchor="ctr">
+            <a:spAutoFit/>
+          </a:bodyPr>
+          <a:lstStyle/>
+          <a:p>
+            <a:pPr algn="l"/>
+            <a:r>
               <a:rPr sz="1800" b="1" i="0">
                 <a:solidFill>
                   <a:srgbClr val="5B3DF5"/>
@@ -7201,14 +7667,14 @@
       </p:sp>
       <p:sp>
         <p:nvSpPr>
-          <p:cNvPr id="8" name="TextBox 7"/>
-          <p:cNvSpPr txBox="1"/>
-          <p:nvPr/>
-        </p:nvSpPr>
-        <p:spPr>
-          <a:xfrm>
-            <a:off x="594360" y="2743200"/>
-            <a:ext cx="5394960" cy="594360"/>
+          <p:cNvPr id="9" name="TextBox 8"/>
+          <p:cNvSpPr txBox="1"/>
+          <p:nvPr/>
+        </p:nvSpPr>
+        <p:spPr>
+          <a:xfrm>
+            <a:off x="1828800" y="2788920"/>
+            <a:ext cx="4572000" cy="731520"/>
           </a:xfrm>
           <a:prstGeom prst="rect">
             <a:avLst/>
@@ -7236,14 +7702,14 @@
       </p:sp>
       <p:sp>
         <p:nvSpPr>
-          <p:cNvPr id="9" name="TextBox 8"/>
-          <p:cNvSpPr txBox="1"/>
-          <p:nvPr/>
-        </p:nvSpPr>
-        <p:spPr>
-          <a:xfrm>
-            <a:off x="6263640" y="2743200"/>
-            <a:ext cx="5394960" cy="594360"/>
+          <p:cNvPr id="10" name="TextBox 9"/>
+          <p:cNvSpPr txBox="1"/>
+          <p:nvPr/>
+        </p:nvSpPr>
+        <p:spPr>
+          <a:xfrm>
+            <a:off x="7132320" y="2788920"/>
+            <a:ext cx="4572000" cy="731520"/>
           </a:xfrm>
           <a:prstGeom prst="rect">
             <a:avLst/>
@@ -7271,14 +7737,14 @@
       </p:sp>
       <p:sp>
         <p:nvSpPr>
-          <p:cNvPr id="10" name="TextBox 9"/>
-          <p:cNvSpPr txBox="1"/>
-          <p:nvPr/>
-        </p:nvSpPr>
-        <p:spPr>
-          <a:xfrm>
-            <a:off x="594360" y="3474720"/>
-            <a:ext cx="5394960" cy="594360"/>
+          <p:cNvPr id="11" name="TextBox 10"/>
+          <p:cNvSpPr txBox="1"/>
+          <p:nvPr/>
+        </p:nvSpPr>
+        <p:spPr>
+          <a:xfrm>
+            <a:off x="1828800" y="3977639"/>
+            <a:ext cx="4572000" cy="731520"/>
           </a:xfrm>
           <a:prstGeom prst="rect">
             <a:avLst/>
@@ -7306,14 +7772,14 @@
       </p:sp>
       <p:sp>
         <p:nvSpPr>
-          <p:cNvPr id="11" name="TextBox 10"/>
-          <p:cNvSpPr txBox="1"/>
-          <p:nvPr/>
-        </p:nvSpPr>
-        <p:spPr>
-          <a:xfrm>
-            <a:off x="6263640" y="3474720"/>
-            <a:ext cx="5394960" cy="594360"/>
+          <p:cNvPr id="12" name="TextBox 11"/>
+          <p:cNvSpPr txBox="1"/>
+          <p:nvPr/>
+        </p:nvSpPr>
+        <p:spPr>
+          <a:xfrm>
+            <a:off x="7132320" y="3977639"/>
+            <a:ext cx="4572000" cy="731520"/>
           </a:xfrm>
           <a:prstGeom prst="rect">
             <a:avLst/>
@@ -7341,14 +7807,14 @@
       </p:sp>
       <p:sp>
         <p:nvSpPr>
-          <p:cNvPr id="12" name="TextBox 11"/>
-          <p:cNvSpPr txBox="1"/>
-          <p:nvPr/>
-        </p:nvSpPr>
-        <p:spPr>
-          <a:xfrm>
-            <a:off x="594360" y="4206240"/>
-            <a:ext cx="5394960" cy="594360"/>
+          <p:cNvPr id="13" name="TextBox 12"/>
+          <p:cNvSpPr txBox="1"/>
+          <p:nvPr/>
+        </p:nvSpPr>
+        <p:spPr>
+          <a:xfrm>
+            <a:off x="1828800" y="5166360"/>
+            <a:ext cx="4572000" cy="731520"/>
           </a:xfrm>
           <a:prstGeom prst="rect">
             <a:avLst/>
@@ -7376,14 +7842,14 @@
       </p:sp>
       <p:sp>
         <p:nvSpPr>
-          <p:cNvPr id="13" name="TextBox 12"/>
-          <p:cNvSpPr txBox="1"/>
-          <p:nvPr/>
-        </p:nvSpPr>
-        <p:spPr>
-          <a:xfrm>
-            <a:off x="6263640" y="4206240"/>
-            <a:ext cx="5394960" cy="594360"/>
+          <p:cNvPr id="14" name="TextBox 13"/>
+          <p:cNvSpPr txBox="1"/>
+          <p:nvPr/>
+        </p:nvSpPr>
+        <p:spPr>
+          <a:xfrm>
+            <a:off x="7132320" y="5166360"/>
+            <a:ext cx="4572000" cy="731520"/>
           </a:xfrm>
           <a:prstGeom prst="rect">
             <a:avLst/>
@@ -7444,7 +7910,7 @@
         <p:spPr>
           <a:xfrm>
             <a:off x="0" y="0"/>
-            <a:ext cx="118872" cy="6858000"/>
+            <a:ext cx="1554480" cy="6858000"/>
           </a:xfrm>
           <a:prstGeom prst="rect">
             <a:avLst/>
@@ -7481,119 +7947,14 @@
       </p:sp>
       <p:sp>
         <p:nvSpPr>
-          <p:cNvPr id="3" name="TextBox 2"/>
-          <p:cNvSpPr txBox="1"/>
-          <p:nvPr/>
-        </p:nvSpPr>
-        <p:spPr>
-          <a:xfrm>
-            <a:off x="457200" y="6419088"/>
-            <a:ext cx="3657600" cy="274320"/>
-          </a:xfrm>
-          <a:prstGeom prst="rect">
-            <a:avLst/>
-          </a:prstGeom>
-          <a:noFill/>
-        </p:spPr>
-        <p:txBody>
-          <a:bodyPr wrap="none">
-            <a:spAutoFit/>
-          </a:bodyPr>
-          <a:lstStyle/>
-          <a:p>
-            <a:pPr algn="l"/>
-            <a:r>
-              <a:rPr sz="900" b="0">
-                <a:solidFill>
-                  <a:srgbClr val="6E6A8A"/>
-                </a:solidFill>
-                <a:latin typeface="Microsoft YaHei"/>
-              </a:rPr>
-              <a:t>LESSONFORGE 微课</a:t>
-            </a:r>
-          </a:p>
-        </p:txBody>
-      </p:sp>
-      <p:sp>
-        <p:nvSpPr>
-          <p:cNvPr id="4" name="TextBox 3"/>
-          <p:cNvSpPr txBox="1"/>
-          <p:nvPr/>
-        </p:nvSpPr>
-        <p:spPr>
-          <a:xfrm>
-            <a:off x="10607040" y="6419088"/>
-            <a:ext cx="1097280" cy="274320"/>
-          </a:xfrm>
-          <a:prstGeom prst="rect">
-            <a:avLst/>
-          </a:prstGeom>
-          <a:noFill/>
-        </p:spPr>
-        <p:txBody>
-          <a:bodyPr wrap="none">
-            <a:spAutoFit/>
-          </a:bodyPr>
-          <a:lstStyle/>
-          <a:p>
-            <a:pPr algn="r"/>
-            <a:r>
-              <a:rPr sz="1000" b="1">
-                <a:solidFill>
-                  <a:srgbClr val="6E6A8A"/>
-                </a:solidFill>
-                <a:latin typeface="Microsoft YaHei"/>
-              </a:rPr>
-              <a:t>06</a:t>
-            </a:r>
-          </a:p>
-        </p:txBody>
-      </p:sp>
-      <p:sp>
-        <p:nvSpPr>
-          <p:cNvPr id="5" name="TextBox 4"/>
-          <p:cNvSpPr txBox="1"/>
-          <p:nvPr/>
-        </p:nvSpPr>
-        <p:spPr>
-          <a:xfrm>
-            <a:off x="548640" y="457200"/>
-            <a:ext cx="11064240" cy="777240"/>
-          </a:xfrm>
-          <a:prstGeom prst="rect">
-            <a:avLst/>
-          </a:prstGeom>
-          <a:noFill/>
-        </p:spPr>
-        <p:txBody>
-          <a:bodyPr wrap="square" lIns="18288" rIns="18288" tIns="9144" bIns="9144" anchor="ctr">
-            <a:spAutoFit/>
-          </a:bodyPr>
-          <a:lstStyle/>
-          <a:p>
-            <a:pPr algn="l"/>
-            <a:r>
-              <a:rPr sz="2800" b="1" i="0">
-                <a:solidFill>
-                  <a:srgbClr val="5B3DF5"/>
-                </a:solidFill>
-                <a:latin typeface="Microsoft YaHei"/>
-              </a:rPr>
-              <a:t/>
-            </a:r>
-          </a:p>
-        </p:txBody>
-      </p:sp>
-      <p:sp>
-        <p:nvSpPr>
-          <p:cNvPr id="6" name="Rectangle 5"/>
+          <p:cNvPr id="3" name="Rectangle 2"/>
           <p:cNvSpPr/>
           <p:nvPr/>
         </p:nvSpPr>
         <p:spPr>
           <a:xfrm>
-            <a:off x="566928" y="1298448"/>
-            <a:ext cx="1234440" cy="82296"/>
+            <a:off x="1554480" y="0"/>
+            <a:ext cx="64008" cy="6858000"/>
           </a:xfrm>
           <a:prstGeom prst="rect">
             <a:avLst/>
@@ -7630,14 +7991,84 @@
       </p:sp>
       <p:sp>
         <p:nvSpPr>
-          <p:cNvPr id="7" name="TextBox 6"/>
-          <p:cNvSpPr txBox="1"/>
-          <p:nvPr/>
-        </p:nvSpPr>
-        <p:spPr>
-          <a:xfrm>
-            <a:off x="594360" y="1645920"/>
-            <a:ext cx="3200400" cy="457200"/>
+          <p:cNvPr id="4" name="TextBox 3"/>
+          <p:cNvSpPr txBox="1"/>
+          <p:nvPr/>
+        </p:nvSpPr>
+        <p:spPr>
+          <a:xfrm>
+            <a:off x="411480" y="6419088"/>
+            <a:ext cx="1097280" cy="274320"/>
+          </a:xfrm>
+          <a:prstGeom prst="rect">
+            <a:avLst/>
+          </a:prstGeom>
+          <a:noFill/>
+        </p:spPr>
+        <p:txBody>
+          <a:bodyPr wrap="none">
+            <a:spAutoFit/>
+          </a:bodyPr>
+          <a:lstStyle/>
+          <a:p>
+            <a:pPr algn="l"/>
+            <a:r>
+              <a:rPr sz="900" b="0">
+                <a:solidFill>
+                  <a:srgbClr val="FFFFFF"/>
+                </a:solidFill>
+                <a:latin typeface="Microsoft YaHei"/>
+              </a:rPr>
+              <a:t>LESSONFORGE 微课</a:t>
+            </a:r>
+          </a:p>
+        </p:txBody>
+      </p:sp>
+      <p:sp>
+        <p:nvSpPr>
+          <p:cNvPr id="5" name="TextBox 4"/>
+          <p:cNvSpPr txBox="1"/>
+          <p:nvPr/>
+        </p:nvSpPr>
+        <p:spPr>
+          <a:xfrm>
+            <a:off x="10607040" y="6419088"/>
+            <a:ext cx="1097280" cy="274320"/>
+          </a:xfrm>
+          <a:prstGeom prst="rect">
+            <a:avLst/>
+          </a:prstGeom>
+          <a:noFill/>
+        </p:spPr>
+        <p:txBody>
+          <a:bodyPr wrap="none">
+            <a:spAutoFit/>
+          </a:bodyPr>
+          <a:lstStyle/>
+          <a:p>
+            <a:pPr algn="r"/>
+            <a:r>
+              <a:rPr sz="1000" b="1">
+                <a:solidFill>
+                  <a:srgbClr val="6E6A8A"/>
+                </a:solidFill>
+                <a:latin typeface="Microsoft YaHei"/>
+              </a:rPr>
+              <a:t>06</a:t>
+            </a:r>
+          </a:p>
+        </p:txBody>
+      </p:sp>
+      <p:sp>
+        <p:nvSpPr>
+          <p:cNvPr id="6" name="TextBox 5"/>
+          <p:cNvSpPr txBox="1"/>
+          <p:nvPr/>
+        </p:nvSpPr>
+        <p:spPr>
+          <a:xfrm>
+            <a:off x="1828800" y="502920"/>
+            <a:ext cx="9966960" cy="777240"/>
           </a:xfrm>
           <a:prstGeom prst="rect">
             <a:avLst/>
@@ -7652,6 +8083,85 @@
           <a:p>
             <a:pPr algn="l"/>
             <a:r>
+              <a:rPr sz="2800" b="1" i="0">
+                <a:solidFill>
+                  <a:srgbClr val="5B3DF5"/>
+                </a:solidFill>
+                <a:latin typeface="Microsoft YaHei"/>
+              </a:rPr>
+              <a:t/>
+            </a:r>
+          </a:p>
+        </p:txBody>
+      </p:sp>
+      <p:sp>
+        <p:nvSpPr>
+          <p:cNvPr id="7" name="Rectangle 6"/>
+          <p:cNvSpPr/>
+          <p:nvPr/>
+        </p:nvSpPr>
+        <p:spPr>
+          <a:xfrm>
+            <a:off x="1856231" y="1335024"/>
+            <a:ext cx="1234440" cy="82296"/>
+          </a:xfrm>
+          <a:prstGeom prst="rect">
+            <a:avLst/>
+          </a:prstGeom>
+          <a:solidFill>
+            <a:srgbClr val="5B3DF5"/>
+          </a:solidFill>
+          <a:ln>
+            <a:noFill/>
+          </a:ln>
+          <a:effectLst/>
+        </p:spPr>
+        <p:style>
+          <a:lnRef idx="1">
+            <a:schemeClr val="accent1"/>
+          </a:lnRef>
+          <a:fillRef idx="3">
+            <a:schemeClr val="accent1"/>
+          </a:fillRef>
+          <a:effectRef idx="2">
+            <a:schemeClr val="accent1"/>
+          </a:effectRef>
+          <a:fontRef idx="minor">
+            <a:schemeClr val="lt1"/>
+          </a:fontRef>
+        </p:style>
+        <p:txBody>
+          <a:bodyPr rtlCol="0" anchor="ctr"/>
+          <a:lstStyle/>
+          <a:p>
+            <a:pPr algn="ctr"/>
+          </a:p>
+        </p:txBody>
+      </p:sp>
+      <p:sp>
+        <p:nvSpPr>
+          <p:cNvPr id="8" name="TextBox 7"/>
+          <p:cNvSpPr txBox="1"/>
+          <p:nvPr/>
+        </p:nvSpPr>
+        <p:spPr>
+          <a:xfrm>
+            <a:off x="1828800" y="1691640"/>
+            <a:ext cx="2926080" cy="457200"/>
+          </a:xfrm>
+          <a:prstGeom prst="rect">
+            <a:avLst/>
+          </a:prstGeom>
+          <a:noFill/>
+        </p:spPr>
+        <p:txBody>
+          <a:bodyPr wrap="square" lIns="18288" rIns="18288" tIns="9144" bIns="9144" anchor="ctr">
+            <a:spAutoFit/>
+          </a:bodyPr>
+          <a:lstStyle/>
+          <a:p>
+            <a:pPr algn="l"/>
+            <a:r>
               <a:rPr sz="1400" b="1" i="0">
                 <a:solidFill>
                   <a:srgbClr val="5B3DF5"/>
@@ -7665,14 +8175,14 @@
       </p:sp>
       <p:sp>
         <p:nvSpPr>
-          <p:cNvPr id="8" name="TextBox 7"/>
-          <p:cNvSpPr txBox="1"/>
-          <p:nvPr/>
-        </p:nvSpPr>
-        <p:spPr>
-          <a:xfrm>
-            <a:off x="594360" y="2194560"/>
-            <a:ext cx="10972800" cy="731520"/>
+          <p:cNvPr id="9" name="TextBox 8"/>
+          <p:cNvSpPr txBox="1"/>
+          <p:nvPr/>
+        </p:nvSpPr>
+        <p:spPr>
+          <a:xfrm>
+            <a:off x="1828800" y="2286000"/>
+            <a:ext cx="4572000" cy="1005840"/>
           </a:xfrm>
           <a:prstGeom prst="rect">
             <a:avLst/>
@@ -7687,7 +8197,7 @@
           <a:p>
             <a:pPr algn="l"/>
             <a:r>
-              <a:rPr sz="1800" b="1" i="0">
+              <a:rPr sz="1600" b="0" i="0">
                 <a:solidFill>
                   <a:srgbClr val="1B1830"/>
                 </a:solidFill>
@@ -7700,14 +8210,14 @@
       </p:sp>
       <p:sp>
         <p:nvSpPr>
-          <p:cNvPr id="9" name="TextBox 8"/>
-          <p:cNvSpPr txBox="1"/>
-          <p:nvPr/>
-        </p:nvSpPr>
-        <p:spPr>
-          <a:xfrm>
-            <a:off x="594360" y="3108960"/>
-            <a:ext cx="10972800" cy="594360"/>
+          <p:cNvPr id="10" name="TextBox 9"/>
+          <p:cNvSpPr txBox="1"/>
+          <p:nvPr/>
+        </p:nvSpPr>
+        <p:spPr>
+          <a:xfrm>
+            <a:off x="7132320" y="2286000"/>
+            <a:ext cx="4572000" cy="1005840"/>
           </a:xfrm>
           <a:prstGeom prst="rect">
             <a:avLst/>
@@ -7735,14 +8245,14 @@
       </p:sp>
       <p:sp>
         <p:nvSpPr>
-          <p:cNvPr id="10" name="TextBox 9"/>
-          <p:cNvSpPr txBox="1"/>
-          <p:nvPr/>
-        </p:nvSpPr>
-        <p:spPr>
-          <a:xfrm>
-            <a:off x="594360" y="3822191"/>
-            <a:ext cx="10972800" cy="594360"/>
+          <p:cNvPr id="11" name="TextBox 10"/>
+          <p:cNvSpPr txBox="1"/>
+          <p:nvPr/>
+        </p:nvSpPr>
+        <p:spPr>
+          <a:xfrm>
+            <a:off x="1828800" y="3749039"/>
+            <a:ext cx="4572000" cy="1005840"/>
           </a:xfrm>
           <a:prstGeom prst="rect">
             <a:avLst/>
@@ -7770,14 +8280,14 @@
       </p:sp>
       <p:sp>
         <p:nvSpPr>
-          <p:cNvPr id="11" name="TextBox 10"/>
-          <p:cNvSpPr txBox="1"/>
-          <p:nvPr/>
-        </p:nvSpPr>
-        <p:spPr>
-          <a:xfrm>
-            <a:off x="594360" y="4535424"/>
-            <a:ext cx="10972800" cy="594360"/>
+          <p:cNvPr id="12" name="TextBox 11"/>
+          <p:cNvSpPr txBox="1"/>
+          <p:nvPr/>
+        </p:nvSpPr>
+        <p:spPr>
+          <a:xfrm>
+            <a:off x="7132320" y="3749039"/>
+            <a:ext cx="4572000" cy="1005840"/>
           </a:xfrm>
           <a:prstGeom prst="rect">
             <a:avLst/>
@@ -7805,14 +8315,49 @@
       </p:sp>
       <p:sp>
         <p:nvSpPr>
-          <p:cNvPr id="12" name="TextBox 11"/>
-          <p:cNvSpPr txBox="1"/>
-          <p:nvPr/>
-        </p:nvSpPr>
-        <p:spPr>
-          <a:xfrm>
-            <a:off x="594360" y="5248656"/>
-            <a:ext cx="10972800" cy="594360"/>
+          <p:cNvPr id="13" name="TextBox 12"/>
+          <p:cNvSpPr txBox="1"/>
+          <p:nvPr/>
+        </p:nvSpPr>
+        <p:spPr>
+          <a:xfrm>
+            <a:off x="1828800" y="5212080"/>
+            <a:ext cx="4572000" cy="1005840"/>
+          </a:xfrm>
+          <a:prstGeom prst="rect">
+            <a:avLst/>
+          </a:prstGeom>
+          <a:noFill/>
+        </p:spPr>
+        <p:txBody>
+          <a:bodyPr wrap="square" lIns="18288" rIns="18288" tIns="9144" bIns="9144" anchor="ctr">
+            <a:spAutoFit/>
+          </a:bodyPr>
+          <a:lstStyle/>
+          <a:p>
+            <a:pPr algn="l"/>
+            <a:r>
+              <a:rPr sz="1600" b="0" i="0">
+                <a:solidFill>
+                  <a:srgbClr val="1B1830"/>
+                </a:solidFill>
+                <a:latin typeface="Microsoft YaHei"/>
+              </a:rPr>
+              <a:t/>
+            </a:r>
+          </a:p>
+        </p:txBody>
+      </p:sp>
+      <p:sp>
+        <p:nvSpPr>
+          <p:cNvPr id="14" name="TextBox 13"/>
+          <p:cNvSpPr txBox="1"/>
+          <p:nvPr/>
+        </p:nvSpPr>
+        <p:spPr>
+          <a:xfrm>
+            <a:off x="7132320" y="5212080"/>
+            <a:ext cx="4572000" cy="1005840"/>
           </a:xfrm>
           <a:prstGeom prst="rect">
             <a:avLst/>
@@ -7873,7 +8418,7 @@
         <p:spPr>
           <a:xfrm>
             <a:off x="0" y="0"/>
-            <a:ext cx="118872" cy="6858000"/>
+            <a:ext cx="1554480" cy="6858000"/>
           </a:xfrm>
           <a:prstGeom prst="rect">
             <a:avLst/>
@@ -7910,119 +8455,14 @@
       </p:sp>
       <p:sp>
         <p:nvSpPr>
-          <p:cNvPr id="3" name="TextBox 2"/>
-          <p:cNvSpPr txBox="1"/>
-          <p:nvPr/>
-        </p:nvSpPr>
-        <p:spPr>
-          <a:xfrm>
-            <a:off x="457200" y="6419088"/>
-            <a:ext cx="3657600" cy="274320"/>
-          </a:xfrm>
-          <a:prstGeom prst="rect">
-            <a:avLst/>
-          </a:prstGeom>
-          <a:noFill/>
-        </p:spPr>
-        <p:txBody>
-          <a:bodyPr wrap="none">
-            <a:spAutoFit/>
-          </a:bodyPr>
-          <a:lstStyle/>
-          <a:p>
-            <a:pPr algn="l"/>
-            <a:r>
-              <a:rPr sz="900" b="0">
-                <a:solidFill>
-                  <a:srgbClr val="6E6A8A"/>
-                </a:solidFill>
-                <a:latin typeface="Microsoft YaHei"/>
-              </a:rPr>
-              <a:t>LESSONFORGE 微课</a:t>
-            </a:r>
-          </a:p>
-        </p:txBody>
-      </p:sp>
-      <p:sp>
-        <p:nvSpPr>
-          <p:cNvPr id="4" name="TextBox 3"/>
-          <p:cNvSpPr txBox="1"/>
-          <p:nvPr/>
-        </p:nvSpPr>
-        <p:spPr>
-          <a:xfrm>
-            <a:off x="10607040" y="6419088"/>
-            <a:ext cx="1097280" cy="274320"/>
-          </a:xfrm>
-          <a:prstGeom prst="rect">
-            <a:avLst/>
-          </a:prstGeom>
-          <a:noFill/>
-        </p:spPr>
-        <p:txBody>
-          <a:bodyPr wrap="none">
-            <a:spAutoFit/>
-          </a:bodyPr>
-          <a:lstStyle/>
-          <a:p>
-            <a:pPr algn="r"/>
-            <a:r>
-              <a:rPr sz="1000" b="1">
-                <a:solidFill>
-                  <a:srgbClr val="6E6A8A"/>
-                </a:solidFill>
-                <a:latin typeface="Microsoft YaHei"/>
-              </a:rPr>
-              <a:t>07</a:t>
-            </a:r>
-          </a:p>
-        </p:txBody>
-      </p:sp>
-      <p:sp>
-        <p:nvSpPr>
-          <p:cNvPr id="5" name="TextBox 4"/>
-          <p:cNvSpPr txBox="1"/>
-          <p:nvPr/>
-        </p:nvSpPr>
-        <p:spPr>
-          <a:xfrm>
-            <a:off x="548640" y="457200"/>
-            <a:ext cx="11064240" cy="777240"/>
-          </a:xfrm>
-          <a:prstGeom prst="rect">
-            <a:avLst/>
-          </a:prstGeom>
-          <a:noFill/>
-        </p:spPr>
-        <p:txBody>
-          <a:bodyPr wrap="square" lIns="18288" rIns="18288" tIns="9144" bIns="9144" anchor="ctr">
-            <a:spAutoFit/>
-          </a:bodyPr>
-          <a:lstStyle/>
-          <a:p>
-            <a:pPr algn="l"/>
-            <a:r>
-              <a:rPr sz="2800" b="1" i="0">
-                <a:solidFill>
-                  <a:srgbClr val="5B3DF5"/>
-                </a:solidFill>
-                <a:latin typeface="Microsoft YaHei"/>
-              </a:rPr>
-              <a:t/>
-            </a:r>
-          </a:p>
-        </p:txBody>
-      </p:sp>
-      <p:sp>
-        <p:nvSpPr>
-          <p:cNvPr id="6" name="Rectangle 5"/>
+          <p:cNvPr id="3" name="Rectangle 2"/>
           <p:cNvSpPr/>
           <p:nvPr/>
         </p:nvSpPr>
         <p:spPr>
           <a:xfrm>
-            <a:off x="566928" y="1298448"/>
-            <a:ext cx="1234440" cy="82296"/>
+            <a:off x="1554480" y="0"/>
+            <a:ext cx="64008" cy="6858000"/>
           </a:xfrm>
           <a:prstGeom prst="rect">
             <a:avLst/>
@@ -8059,14 +8499,84 @@
       </p:sp>
       <p:sp>
         <p:nvSpPr>
-          <p:cNvPr id="7" name="TextBox 6"/>
-          <p:cNvSpPr txBox="1"/>
-          <p:nvPr/>
-        </p:nvSpPr>
-        <p:spPr>
-          <a:xfrm>
-            <a:off x="594360" y="1645920"/>
-            <a:ext cx="3200400" cy="457200"/>
+          <p:cNvPr id="4" name="TextBox 3"/>
+          <p:cNvSpPr txBox="1"/>
+          <p:nvPr/>
+        </p:nvSpPr>
+        <p:spPr>
+          <a:xfrm>
+            <a:off x="411480" y="6419088"/>
+            <a:ext cx="1097280" cy="274320"/>
+          </a:xfrm>
+          <a:prstGeom prst="rect">
+            <a:avLst/>
+          </a:prstGeom>
+          <a:noFill/>
+        </p:spPr>
+        <p:txBody>
+          <a:bodyPr wrap="none">
+            <a:spAutoFit/>
+          </a:bodyPr>
+          <a:lstStyle/>
+          <a:p>
+            <a:pPr algn="l"/>
+            <a:r>
+              <a:rPr sz="900" b="0">
+                <a:solidFill>
+                  <a:srgbClr val="FFFFFF"/>
+                </a:solidFill>
+                <a:latin typeface="Microsoft YaHei"/>
+              </a:rPr>
+              <a:t>LESSONFORGE 微课</a:t>
+            </a:r>
+          </a:p>
+        </p:txBody>
+      </p:sp>
+      <p:sp>
+        <p:nvSpPr>
+          <p:cNvPr id="5" name="TextBox 4"/>
+          <p:cNvSpPr txBox="1"/>
+          <p:nvPr/>
+        </p:nvSpPr>
+        <p:spPr>
+          <a:xfrm>
+            <a:off x="10607040" y="6419088"/>
+            <a:ext cx="1097280" cy="274320"/>
+          </a:xfrm>
+          <a:prstGeom prst="rect">
+            <a:avLst/>
+          </a:prstGeom>
+          <a:noFill/>
+        </p:spPr>
+        <p:txBody>
+          <a:bodyPr wrap="none">
+            <a:spAutoFit/>
+          </a:bodyPr>
+          <a:lstStyle/>
+          <a:p>
+            <a:pPr algn="r"/>
+            <a:r>
+              <a:rPr sz="1000" b="1">
+                <a:solidFill>
+                  <a:srgbClr val="6E6A8A"/>
+                </a:solidFill>
+                <a:latin typeface="Microsoft YaHei"/>
+              </a:rPr>
+              <a:t>07</a:t>
+            </a:r>
+          </a:p>
+        </p:txBody>
+      </p:sp>
+      <p:sp>
+        <p:nvSpPr>
+          <p:cNvPr id="6" name="TextBox 5"/>
+          <p:cNvSpPr txBox="1"/>
+          <p:nvPr/>
+        </p:nvSpPr>
+        <p:spPr>
+          <a:xfrm>
+            <a:off x="1828800" y="502920"/>
+            <a:ext cx="9966960" cy="777240"/>
           </a:xfrm>
           <a:prstGeom prst="rect">
             <a:avLst/>
@@ -8081,6 +8591,85 @@
           <a:p>
             <a:pPr algn="l"/>
             <a:r>
+              <a:rPr sz="2800" b="1" i="0">
+                <a:solidFill>
+                  <a:srgbClr val="5B3DF5"/>
+                </a:solidFill>
+                <a:latin typeface="Microsoft YaHei"/>
+              </a:rPr>
+              <a:t/>
+            </a:r>
+          </a:p>
+        </p:txBody>
+      </p:sp>
+      <p:sp>
+        <p:nvSpPr>
+          <p:cNvPr id="7" name="Rectangle 6"/>
+          <p:cNvSpPr/>
+          <p:nvPr/>
+        </p:nvSpPr>
+        <p:spPr>
+          <a:xfrm>
+            <a:off x="1856231" y="1335024"/>
+            <a:ext cx="1234440" cy="82296"/>
+          </a:xfrm>
+          <a:prstGeom prst="rect">
+            <a:avLst/>
+          </a:prstGeom>
+          <a:solidFill>
+            <a:srgbClr val="5B3DF5"/>
+          </a:solidFill>
+          <a:ln>
+            <a:noFill/>
+          </a:ln>
+          <a:effectLst/>
+        </p:spPr>
+        <p:style>
+          <a:lnRef idx="1">
+            <a:schemeClr val="accent1"/>
+          </a:lnRef>
+          <a:fillRef idx="3">
+            <a:schemeClr val="accent1"/>
+          </a:fillRef>
+          <a:effectRef idx="2">
+            <a:schemeClr val="accent1"/>
+          </a:effectRef>
+          <a:fontRef idx="minor">
+            <a:schemeClr val="lt1"/>
+          </a:fontRef>
+        </p:style>
+        <p:txBody>
+          <a:bodyPr rtlCol="0" anchor="ctr"/>
+          <a:lstStyle/>
+          <a:p>
+            <a:pPr algn="ctr"/>
+          </a:p>
+        </p:txBody>
+      </p:sp>
+      <p:sp>
+        <p:nvSpPr>
+          <p:cNvPr id="8" name="TextBox 7"/>
+          <p:cNvSpPr txBox="1"/>
+          <p:nvPr/>
+        </p:nvSpPr>
+        <p:spPr>
+          <a:xfrm>
+            <a:off x="1828800" y="1691640"/>
+            <a:ext cx="2926080" cy="457200"/>
+          </a:xfrm>
+          <a:prstGeom prst="rect">
+            <a:avLst/>
+          </a:prstGeom>
+          <a:noFill/>
+        </p:spPr>
+        <p:txBody>
+          <a:bodyPr wrap="square" lIns="18288" rIns="18288" tIns="9144" bIns="9144" anchor="ctr">
+            <a:spAutoFit/>
+          </a:bodyPr>
+          <a:lstStyle/>
+          <a:p>
+            <a:pPr algn="l"/>
+            <a:r>
               <a:rPr sz="1400" b="1" i="0">
                 <a:solidFill>
                   <a:srgbClr val="5B3DF5"/>
@@ -8094,14 +8683,14 @@
       </p:sp>
       <p:sp>
         <p:nvSpPr>
-          <p:cNvPr id="8" name="TextBox 7"/>
-          <p:cNvSpPr txBox="1"/>
-          <p:nvPr/>
-        </p:nvSpPr>
-        <p:spPr>
-          <a:xfrm>
-            <a:off x="594360" y="2194560"/>
-            <a:ext cx="10972800" cy="731520"/>
+          <p:cNvPr id="9" name="TextBox 8"/>
+          <p:cNvSpPr txBox="1"/>
+          <p:nvPr/>
+        </p:nvSpPr>
+        <p:spPr>
+          <a:xfrm>
+            <a:off x="1828800" y="2286000"/>
+            <a:ext cx="4572000" cy="1005840"/>
           </a:xfrm>
           <a:prstGeom prst="rect">
             <a:avLst/>
@@ -8116,7 +8705,7 @@
           <a:p>
             <a:pPr algn="l"/>
             <a:r>
-              <a:rPr sz="1800" b="1" i="0">
+              <a:rPr sz="1600" b="0" i="0">
                 <a:solidFill>
                   <a:srgbClr val="1B1830"/>
                 </a:solidFill>
@@ -8129,14 +8718,14 @@
       </p:sp>
       <p:sp>
         <p:nvSpPr>
-          <p:cNvPr id="9" name="TextBox 8"/>
-          <p:cNvSpPr txBox="1"/>
-          <p:nvPr/>
-        </p:nvSpPr>
-        <p:spPr>
-          <a:xfrm>
-            <a:off x="594360" y="3108960"/>
-            <a:ext cx="10972800" cy="594360"/>
+          <p:cNvPr id="10" name="TextBox 9"/>
+          <p:cNvSpPr txBox="1"/>
+          <p:nvPr/>
+        </p:nvSpPr>
+        <p:spPr>
+          <a:xfrm>
+            <a:off x="7132320" y="2286000"/>
+            <a:ext cx="4572000" cy="1005840"/>
           </a:xfrm>
           <a:prstGeom prst="rect">
             <a:avLst/>
@@ -8164,14 +8753,14 @@
       </p:sp>
       <p:sp>
         <p:nvSpPr>
-          <p:cNvPr id="10" name="TextBox 9"/>
-          <p:cNvSpPr txBox="1"/>
-          <p:nvPr/>
-        </p:nvSpPr>
-        <p:spPr>
-          <a:xfrm>
-            <a:off x="594360" y="3822191"/>
-            <a:ext cx="10972800" cy="594360"/>
+          <p:cNvPr id="11" name="TextBox 10"/>
+          <p:cNvSpPr txBox="1"/>
+          <p:nvPr/>
+        </p:nvSpPr>
+        <p:spPr>
+          <a:xfrm>
+            <a:off x="1828800" y="3749039"/>
+            <a:ext cx="4572000" cy="1005840"/>
           </a:xfrm>
           <a:prstGeom prst="rect">
             <a:avLst/>
@@ -8199,14 +8788,14 @@
       </p:sp>
       <p:sp>
         <p:nvSpPr>
-          <p:cNvPr id="11" name="TextBox 10"/>
-          <p:cNvSpPr txBox="1"/>
-          <p:nvPr/>
-        </p:nvSpPr>
-        <p:spPr>
-          <a:xfrm>
-            <a:off x="594360" y="4535424"/>
-            <a:ext cx="10972800" cy="594360"/>
+          <p:cNvPr id="12" name="TextBox 11"/>
+          <p:cNvSpPr txBox="1"/>
+          <p:nvPr/>
+        </p:nvSpPr>
+        <p:spPr>
+          <a:xfrm>
+            <a:off x="7132320" y="3749039"/>
+            <a:ext cx="4572000" cy="1005840"/>
           </a:xfrm>
           <a:prstGeom prst="rect">
             <a:avLst/>
@@ -8234,14 +8823,49 @@
       </p:sp>
       <p:sp>
         <p:nvSpPr>
-          <p:cNvPr id="12" name="TextBox 11"/>
-          <p:cNvSpPr txBox="1"/>
-          <p:nvPr/>
-        </p:nvSpPr>
-        <p:spPr>
-          <a:xfrm>
-            <a:off x="594360" y="5248656"/>
-            <a:ext cx="10972800" cy="594360"/>
+          <p:cNvPr id="13" name="TextBox 12"/>
+          <p:cNvSpPr txBox="1"/>
+          <p:nvPr/>
+        </p:nvSpPr>
+        <p:spPr>
+          <a:xfrm>
+            <a:off x="1828800" y="5212080"/>
+            <a:ext cx="4572000" cy="1005840"/>
+          </a:xfrm>
+          <a:prstGeom prst="rect">
+            <a:avLst/>
+          </a:prstGeom>
+          <a:noFill/>
+        </p:spPr>
+        <p:txBody>
+          <a:bodyPr wrap="square" lIns="18288" rIns="18288" tIns="9144" bIns="9144" anchor="ctr">
+            <a:spAutoFit/>
+          </a:bodyPr>
+          <a:lstStyle/>
+          <a:p>
+            <a:pPr algn="l"/>
+            <a:r>
+              <a:rPr sz="1600" b="0" i="0">
+                <a:solidFill>
+                  <a:srgbClr val="1B1830"/>
+                </a:solidFill>
+                <a:latin typeface="Microsoft YaHei"/>
+              </a:rPr>
+              <a:t/>
+            </a:r>
+          </a:p>
+        </p:txBody>
+      </p:sp>
+      <p:sp>
+        <p:nvSpPr>
+          <p:cNvPr id="14" name="TextBox 13"/>
+          <p:cNvSpPr txBox="1"/>
+          <p:nvPr/>
+        </p:nvSpPr>
+        <p:spPr>
+          <a:xfrm>
+            <a:off x="7132320" y="5212080"/>
+            <a:ext cx="4572000" cy="1005840"/>
           </a:xfrm>
           <a:prstGeom prst="rect">
             <a:avLst/>
@@ -8302,7 +8926,7 @@
         <p:spPr>
           <a:xfrm>
             <a:off x="0" y="0"/>
-            <a:ext cx="118872" cy="6858000"/>
+            <a:ext cx="1554480" cy="6858000"/>
           </a:xfrm>
           <a:prstGeom prst="rect">
             <a:avLst/>
@@ -8339,119 +8963,14 @@
       </p:sp>
       <p:sp>
         <p:nvSpPr>
-          <p:cNvPr id="3" name="TextBox 2"/>
-          <p:cNvSpPr txBox="1"/>
-          <p:nvPr/>
-        </p:nvSpPr>
-        <p:spPr>
-          <a:xfrm>
-            <a:off x="457200" y="6419088"/>
-            <a:ext cx="3657600" cy="274320"/>
-          </a:xfrm>
-          <a:prstGeom prst="rect">
-            <a:avLst/>
-          </a:prstGeom>
-          <a:noFill/>
-        </p:spPr>
-        <p:txBody>
-          <a:bodyPr wrap="none">
-            <a:spAutoFit/>
-          </a:bodyPr>
-          <a:lstStyle/>
-          <a:p>
-            <a:pPr algn="l"/>
-            <a:r>
-              <a:rPr sz="900" b="0">
-                <a:solidFill>
-                  <a:srgbClr val="6E6A8A"/>
-                </a:solidFill>
-                <a:latin typeface="Microsoft YaHei"/>
-              </a:rPr>
-              <a:t>LESSONFORGE 微课</a:t>
-            </a:r>
-          </a:p>
-        </p:txBody>
-      </p:sp>
-      <p:sp>
-        <p:nvSpPr>
-          <p:cNvPr id="4" name="TextBox 3"/>
-          <p:cNvSpPr txBox="1"/>
-          <p:nvPr/>
-        </p:nvSpPr>
-        <p:spPr>
-          <a:xfrm>
-            <a:off x="10607040" y="6419088"/>
-            <a:ext cx="1097280" cy="274320"/>
-          </a:xfrm>
-          <a:prstGeom prst="rect">
-            <a:avLst/>
-          </a:prstGeom>
-          <a:noFill/>
-        </p:spPr>
-        <p:txBody>
-          <a:bodyPr wrap="none">
-            <a:spAutoFit/>
-          </a:bodyPr>
-          <a:lstStyle/>
-          <a:p>
-            <a:pPr algn="r"/>
-            <a:r>
-              <a:rPr sz="1000" b="1">
-                <a:solidFill>
-                  <a:srgbClr val="6E6A8A"/>
-                </a:solidFill>
-                <a:latin typeface="Microsoft YaHei"/>
-              </a:rPr>
-              <a:t>08</a:t>
-            </a:r>
-          </a:p>
-        </p:txBody>
-      </p:sp>
-      <p:sp>
-        <p:nvSpPr>
-          <p:cNvPr id="5" name="TextBox 4"/>
-          <p:cNvSpPr txBox="1"/>
-          <p:nvPr/>
-        </p:nvSpPr>
-        <p:spPr>
-          <a:xfrm>
-            <a:off x="548640" y="457200"/>
-            <a:ext cx="11064240" cy="777240"/>
-          </a:xfrm>
-          <a:prstGeom prst="rect">
-            <a:avLst/>
-          </a:prstGeom>
-          <a:noFill/>
-        </p:spPr>
-        <p:txBody>
-          <a:bodyPr wrap="square" lIns="18288" rIns="18288" tIns="9144" bIns="9144" anchor="ctr">
-            <a:spAutoFit/>
-          </a:bodyPr>
-          <a:lstStyle/>
-          <a:p>
-            <a:pPr algn="l"/>
-            <a:r>
-              <a:rPr sz="2800" b="1" i="0">
-                <a:solidFill>
-                  <a:srgbClr val="5B3DF5"/>
-                </a:solidFill>
-                <a:latin typeface="Microsoft YaHei"/>
-              </a:rPr>
-              <a:t/>
-            </a:r>
-          </a:p>
-        </p:txBody>
-      </p:sp>
-      <p:sp>
-        <p:nvSpPr>
-          <p:cNvPr id="6" name="Rectangle 5"/>
+          <p:cNvPr id="3" name="Rectangle 2"/>
           <p:cNvSpPr/>
           <p:nvPr/>
         </p:nvSpPr>
         <p:spPr>
           <a:xfrm>
-            <a:off x="566928" y="1298448"/>
-            <a:ext cx="1234440" cy="82296"/>
+            <a:off x="1554480" y="0"/>
+            <a:ext cx="64008" cy="6858000"/>
           </a:xfrm>
           <a:prstGeom prst="rect">
             <a:avLst/>
@@ -8488,14 +9007,84 @@
       </p:sp>
       <p:sp>
         <p:nvSpPr>
-          <p:cNvPr id="7" name="TextBox 6"/>
-          <p:cNvSpPr txBox="1"/>
-          <p:nvPr/>
-        </p:nvSpPr>
-        <p:spPr>
-          <a:xfrm>
-            <a:off x="594360" y="1645920"/>
-            <a:ext cx="3200400" cy="457200"/>
+          <p:cNvPr id="4" name="TextBox 3"/>
+          <p:cNvSpPr txBox="1"/>
+          <p:nvPr/>
+        </p:nvSpPr>
+        <p:spPr>
+          <a:xfrm>
+            <a:off x="411480" y="6419088"/>
+            <a:ext cx="1097280" cy="274320"/>
+          </a:xfrm>
+          <a:prstGeom prst="rect">
+            <a:avLst/>
+          </a:prstGeom>
+          <a:noFill/>
+        </p:spPr>
+        <p:txBody>
+          <a:bodyPr wrap="none">
+            <a:spAutoFit/>
+          </a:bodyPr>
+          <a:lstStyle/>
+          <a:p>
+            <a:pPr algn="l"/>
+            <a:r>
+              <a:rPr sz="900" b="0">
+                <a:solidFill>
+                  <a:srgbClr val="FFFFFF"/>
+                </a:solidFill>
+                <a:latin typeface="Microsoft YaHei"/>
+              </a:rPr>
+              <a:t>LESSONFORGE 微课</a:t>
+            </a:r>
+          </a:p>
+        </p:txBody>
+      </p:sp>
+      <p:sp>
+        <p:nvSpPr>
+          <p:cNvPr id="5" name="TextBox 4"/>
+          <p:cNvSpPr txBox="1"/>
+          <p:nvPr/>
+        </p:nvSpPr>
+        <p:spPr>
+          <a:xfrm>
+            <a:off x="10607040" y="6419088"/>
+            <a:ext cx="1097280" cy="274320"/>
+          </a:xfrm>
+          <a:prstGeom prst="rect">
+            <a:avLst/>
+          </a:prstGeom>
+          <a:noFill/>
+        </p:spPr>
+        <p:txBody>
+          <a:bodyPr wrap="none">
+            <a:spAutoFit/>
+          </a:bodyPr>
+          <a:lstStyle/>
+          <a:p>
+            <a:pPr algn="r"/>
+            <a:r>
+              <a:rPr sz="1000" b="1">
+                <a:solidFill>
+                  <a:srgbClr val="6E6A8A"/>
+                </a:solidFill>
+                <a:latin typeface="Microsoft YaHei"/>
+              </a:rPr>
+              <a:t>08</a:t>
+            </a:r>
+          </a:p>
+        </p:txBody>
+      </p:sp>
+      <p:sp>
+        <p:nvSpPr>
+          <p:cNvPr id="6" name="TextBox 5"/>
+          <p:cNvSpPr txBox="1"/>
+          <p:nvPr/>
+        </p:nvSpPr>
+        <p:spPr>
+          <a:xfrm>
+            <a:off x="1828800" y="502920"/>
+            <a:ext cx="9966960" cy="777240"/>
           </a:xfrm>
           <a:prstGeom prst="rect">
             <a:avLst/>
@@ -8510,6 +9099,85 @@
           <a:p>
             <a:pPr algn="l"/>
             <a:r>
+              <a:rPr sz="2800" b="1" i="0">
+                <a:solidFill>
+                  <a:srgbClr val="5B3DF5"/>
+                </a:solidFill>
+                <a:latin typeface="Microsoft YaHei"/>
+              </a:rPr>
+              <a:t/>
+            </a:r>
+          </a:p>
+        </p:txBody>
+      </p:sp>
+      <p:sp>
+        <p:nvSpPr>
+          <p:cNvPr id="7" name="Rectangle 6"/>
+          <p:cNvSpPr/>
+          <p:nvPr/>
+        </p:nvSpPr>
+        <p:spPr>
+          <a:xfrm>
+            <a:off x="1856231" y="1335024"/>
+            <a:ext cx="1234440" cy="82296"/>
+          </a:xfrm>
+          <a:prstGeom prst="rect">
+            <a:avLst/>
+          </a:prstGeom>
+          <a:solidFill>
+            <a:srgbClr val="5B3DF5"/>
+          </a:solidFill>
+          <a:ln>
+            <a:noFill/>
+          </a:ln>
+          <a:effectLst/>
+        </p:spPr>
+        <p:style>
+          <a:lnRef idx="1">
+            <a:schemeClr val="accent1"/>
+          </a:lnRef>
+          <a:fillRef idx="3">
+            <a:schemeClr val="accent1"/>
+          </a:fillRef>
+          <a:effectRef idx="2">
+            <a:schemeClr val="accent1"/>
+          </a:effectRef>
+          <a:fontRef idx="minor">
+            <a:schemeClr val="lt1"/>
+          </a:fontRef>
+        </p:style>
+        <p:txBody>
+          <a:bodyPr rtlCol="0" anchor="ctr"/>
+          <a:lstStyle/>
+          <a:p>
+            <a:pPr algn="ctr"/>
+          </a:p>
+        </p:txBody>
+      </p:sp>
+      <p:sp>
+        <p:nvSpPr>
+          <p:cNvPr id="8" name="TextBox 7"/>
+          <p:cNvSpPr txBox="1"/>
+          <p:nvPr/>
+        </p:nvSpPr>
+        <p:spPr>
+          <a:xfrm>
+            <a:off x="1828800" y="1691640"/>
+            <a:ext cx="2926080" cy="457200"/>
+          </a:xfrm>
+          <a:prstGeom prst="rect">
+            <a:avLst/>
+          </a:prstGeom>
+          <a:noFill/>
+        </p:spPr>
+        <p:txBody>
+          <a:bodyPr wrap="square" lIns="18288" rIns="18288" tIns="9144" bIns="9144" anchor="ctr">
+            <a:spAutoFit/>
+          </a:bodyPr>
+          <a:lstStyle/>
+          <a:p>
+            <a:pPr algn="l"/>
+            <a:r>
               <a:rPr sz="1400" b="1" i="0">
                 <a:solidFill>
                   <a:srgbClr val="5B3DF5"/>
@@ -8523,14 +9191,14 @@
       </p:sp>
       <p:sp>
         <p:nvSpPr>
-          <p:cNvPr id="8" name="TextBox 7"/>
-          <p:cNvSpPr txBox="1"/>
-          <p:nvPr/>
-        </p:nvSpPr>
-        <p:spPr>
-          <a:xfrm>
-            <a:off x="594360" y="2194560"/>
-            <a:ext cx="10972800" cy="731520"/>
+          <p:cNvPr id="9" name="TextBox 8"/>
+          <p:cNvSpPr txBox="1"/>
+          <p:nvPr/>
+        </p:nvSpPr>
+        <p:spPr>
+          <a:xfrm>
+            <a:off x="1828800" y="2286000"/>
+            <a:ext cx="4572000" cy="1005840"/>
           </a:xfrm>
           <a:prstGeom prst="rect">
             <a:avLst/>
@@ -8545,7 +9213,7 @@
           <a:p>
             <a:pPr algn="l"/>
             <a:r>
-              <a:rPr sz="1800" b="1" i="0">
+              <a:rPr sz="1600" b="0" i="0">
                 <a:solidFill>
                   <a:srgbClr val="1B1830"/>
                 </a:solidFill>
@@ -8558,14 +9226,14 @@
       </p:sp>
       <p:sp>
         <p:nvSpPr>
-          <p:cNvPr id="9" name="TextBox 8"/>
-          <p:cNvSpPr txBox="1"/>
-          <p:nvPr/>
-        </p:nvSpPr>
-        <p:spPr>
-          <a:xfrm>
-            <a:off x="594360" y="3108960"/>
-            <a:ext cx="10972800" cy="594360"/>
+          <p:cNvPr id="10" name="TextBox 9"/>
+          <p:cNvSpPr txBox="1"/>
+          <p:nvPr/>
+        </p:nvSpPr>
+        <p:spPr>
+          <a:xfrm>
+            <a:off x="7132320" y="2286000"/>
+            <a:ext cx="4572000" cy="1005840"/>
           </a:xfrm>
           <a:prstGeom prst="rect">
             <a:avLst/>
@@ -8593,14 +9261,14 @@
       </p:sp>
       <p:sp>
         <p:nvSpPr>
-          <p:cNvPr id="10" name="TextBox 9"/>
-          <p:cNvSpPr txBox="1"/>
-          <p:nvPr/>
-        </p:nvSpPr>
-        <p:spPr>
-          <a:xfrm>
-            <a:off x="594360" y="3822191"/>
-            <a:ext cx="10972800" cy="594360"/>
+          <p:cNvPr id="11" name="TextBox 10"/>
+          <p:cNvSpPr txBox="1"/>
+          <p:nvPr/>
+        </p:nvSpPr>
+        <p:spPr>
+          <a:xfrm>
+            <a:off x="1828800" y="3749039"/>
+            <a:ext cx="4572000" cy="1005840"/>
           </a:xfrm>
           <a:prstGeom prst="rect">
             <a:avLst/>
@@ -8628,14 +9296,14 @@
       </p:sp>
       <p:sp>
         <p:nvSpPr>
-          <p:cNvPr id="11" name="TextBox 10"/>
-          <p:cNvSpPr txBox="1"/>
-          <p:nvPr/>
-        </p:nvSpPr>
-        <p:spPr>
-          <a:xfrm>
-            <a:off x="594360" y="4535424"/>
-            <a:ext cx="10972800" cy="594360"/>
+          <p:cNvPr id="12" name="TextBox 11"/>
+          <p:cNvSpPr txBox="1"/>
+          <p:nvPr/>
+        </p:nvSpPr>
+        <p:spPr>
+          <a:xfrm>
+            <a:off x="7132320" y="3749039"/>
+            <a:ext cx="4572000" cy="1005840"/>
           </a:xfrm>
           <a:prstGeom prst="rect">
             <a:avLst/>
@@ -8663,14 +9331,49 @@
       </p:sp>
       <p:sp>
         <p:nvSpPr>
-          <p:cNvPr id="12" name="TextBox 11"/>
-          <p:cNvSpPr txBox="1"/>
-          <p:nvPr/>
-        </p:nvSpPr>
-        <p:spPr>
-          <a:xfrm>
-            <a:off x="594360" y="5248656"/>
-            <a:ext cx="10972800" cy="594360"/>
+          <p:cNvPr id="13" name="TextBox 12"/>
+          <p:cNvSpPr txBox="1"/>
+          <p:nvPr/>
+        </p:nvSpPr>
+        <p:spPr>
+          <a:xfrm>
+            <a:off x="1828800" y="5212080"/>
+            <a:ext cx="4572000" cy="1005840"/>
+          </a:xfrm>
+          <a:prstGeom prst="rect">
+            <a:avLst/>
+          </a:prstGeom>
+          <a:noFill/>
+        </p:spPr>
+        <p:txBody>
+          <a:bodyPr wrap="square" lIns="18288" rIns="18288" tIns="9144" bIns="9144" anchor="ctr">
+            <a:spAutoFit/>
+          </a:bodyPr>
+          <a:lstStyle/>
+          <a:p>
+            <a:pPr algn="l"/>
+            <a:r>
+              <a:rPr sz="1600" b="0" i="0">
+                <a:solidFill>
+                  <a:srgbClr val="1B1830"/>
+                </a:solidFill>
+                <a:latin typeface="Microsoft YaHei"/>
+              </a:rPr>
+              <a:t/>
+            </a:r>
+          </a:p>
+        </p:txBody>
+      </p:sp>
+      <p:sp>
+        <p:nvSpPr>
+          <p:cNvPr id="14" name="TextBox 13"/>
+          <p:cNvSpPr txBox="1"/>
+          <p:nvPr/>
+        </p:nvSpPr>
+        <p:spPr>
+          <a:xfrm>
+            <a:off x="7132320" y="5212080"/>
+            <a:ext cx="4572000" cy="1005840"/>
           </a:xfrm>
           <a:prstGeom prst="rect">
             <a:avLst/>
@@ -8731,7 +9434,7 @@
         <p:spPr>
           <a:xfrm>
             <a:off x="0" y="0"/>
-            <a:ext cx="118872" cy="6858000"/>
+            <a:ext cx="1554480" cy="6858000"/>
           </a:xfrm>
           <a:prstGeom prst="rect">
             <a:avLst/>
@@ -8768,119 +9471,14 @@
       </p:sp>
       <p:sp>
         <p:nvSpPr>
-          <p:cNvPr id="3" name="TextBox 2"/>
-          <p:cNvSpPr txBox="1"/>
-          <p:nvPr/>
-        </p:nvSpPr>
-        <p:spPr>
-          <a:xfrm>
-            <a:off x="457200" y="6419088"/>
-            <a:ext cx="3657600" cy="274320"/>
-          </a:xfrm>
-          <a:prstGeom prst="rect">
-            <a:avLst/>
-          </a:prstGeom>
-          <a:noFill/>
-        </p:spPr>
-        <p:txBody>
-          <a:bodyPr wrap="none">
-            <a:spAutoFit/>
-          </a:bodyPr>
-          <a:lstStyle/>
-          <a:p>
-            <a:pPr algn="l"/>
-            <a:r>
-              <a:rPr sz="900" b="0">
-                <a:solidFill>
-                  <a:srgbClr val="6E6A8A"/>
-                </a:solidFill>
-                <a:latin typeface="Microsoft YaHei"/>
-              </a:rPr>
-              <a:t>LESSONFORGE 微课</a:t>
-            </a:r>
-          </a:p>
-        </p:txBody>
-      </p:sp>
-      <p:sp>
-        <p:nvSpPr>
-          <p:cNvPr id="4" name="TextBox 3"/>
-          <p:cNvSpPr txBox="1"/>
-          <p:nvPr/>
-        </p:nvSpPr>
-        <p:spPr>
-          <a:xfrm>
-            <a:off x="10607040" y="6419088"/>
-            <a:ext cx="1097280" cy="274320"/>
-          </a:xfrm>
-          <a:prstGeom prst="rect">
-            <a:avLst/>
-          </a:prstGeom>
-          <a:noFill/>
-        </p:spPr>
-        <p:txBody>
-          <a:bodyPr wrap="none">
-            <a:spAutoFit/>
-          </a:bodyPr>
-          <a:lstStyle/>
-          <a:p>
-            <a:pPr algn="r"/>
-            <a:r>
-              <a:rPr sz="1000" b="1">
-                <a:solidFill>
-                  <a:srgbClr val="6E6A8A"/>
-                </a:solidFill>
-                <a:latin typeface="Microsoft YaHei"/>
-              </a:rPr>
-              <a:t>09</a:t>
-            </a:r>
-          </a:p>
-        </p:txBody>
-      </p:sp>
-      <p:sp>
-        <p:nvSpPr>
-          <p:cNvPr id="5" name="TextBox 4"/>
-          <p:cNvSpPr txBox="1"/>
-          <p:nvPr/>
-        </p:nvSpPr>
-        <p:spPr>
-          <a:xfrm>
-            <a:off x="548640" y="457200"/>
-            <a:ext cx="11064240" cy="777240"/>
-          </a:xfrm>
-          <a:prstGeom prst="rect">
-            <a:avLst/>
-          </a:prstGeom>
-          <a:noFill/>
-        </p:spPr>
-        <p:txBody>
-          <a:bodyPr wrap="square" lIns="18288" rIns="18288" tIns="9144" bIns="9144" anchor="ctr">
-            <a:spAutoFit/>
-          </a:bodyPr>
-          <a:lstStyle/>
-          <a:p>
-            <a:pPr algn="l"/>
-            <a:r>
-              <a:rPr sz="2800" b="1" i="0">
-                <a:solidFill>
-                  <a:srgbClr val="5B3DF5"/>
-                </a:solidFill>
-                <a:latin typeface="Microsoft YaHei"/>
-              </a:rPr>
-              <a:t/>
-            </a:r>
-          </a:p>
-        </p:txBody>
-      </p:sp>
-      <p:sp>
-        <p:nvSpPr>
-          <p:cNvPr id="6" name="Rectangle 5"/>
+          <p:cNvPr id="3" name="Rectangle 2"/>
           <p:cNvSpPr/>
           <p:nvPr/>
         </p:nvSpPr>
         <p:spPr>
           <a:xfrm>
-            <a:off x="566928" y="1298448"/>
-            <a:ext cx="1234440" cy="82296"/>
+            <a:off x="1554480" y="0"/>
+            <a:ext cx="64008" cy="6858000"/>
           </a:xfrm>
           <a:prstGeom prst="rect">
             <a:avLst/>
@@ -8917,14 +9515,84 @@
       </p:sp>
       <p:sp>
         <p:nvSpPr>
-          <p:cNvPr id="7" name="TextBox 6"/>
-          <p:cNvSpPr txBox="1"/>
-          <p:nvPr/>
-        </p:nvSpPr>
-        <p:spPr>
-          <a:xfrm>
-            <a:off x="594360" y="1645920"/>
-            <a:ext cx="3200400" cy="457200"/>
+          <p:cNvPr id="4" name="TextBox 3"/>
+          <p:cNvSpPr txBox="1"/>
+          <p:nvPr/>
+        </p:nvSpPr>
+        <p:spPr>
+          <a:xfrm>
+            <a:off x="411480" y="6419088"/>
+            <a:ext cx="1097280" cy="274320"/>
+          </a:xfrm>
+          <a:prstGeom prst="rect">
+            <a:avLst/>
+          </a:prstGeom>
+          <a:noFill/>
+        </p:spPr>
+        <p:txBody>
+          <a:bodyPr wrap="none">
+            <a:spAutoFit/>
+          </a:bodyPr>
+          <a:lstStyle/>
+          <a:p>
+            <a:pPr algn="l"/>
+            <a:r>
+              <a:rPr sz="900" b="0">
+                <a:solidFill>
+                  <a:srgbClr val="FFFFFF"/>
+                </a:solidFill>
+                <a:latin typeface="Microsoft YaHei"/>
+              </a:rPr>
+              <a:t>LESSONFORGE 微课</a:t>
+            </a:r>
+          </a:p>
+        </p:txBody>
+      </p:sp>
+      <p:sp>
+        <p:nvSpPr>
+          <p:cNvPr id="5" name="TextBox 4"/>
+          <p:cNvSpPr txBox="1"/>
+          <p:nvPr/>
+        </p:nvSpPr>
+        <p:spPr>
+          <a:xfrm>
+            <a:off x="10607040" y="6419088"/>
+            <a:ext cx="1097280" cy="274320"/>
+          </a:xfrm>
+          <a:prstGeom prst="rect">
+            <a:avLst/>
+          </a:prstGeom>
+          <a:noFill/>
+        </p:spPr>
+        <p:txBody>
+          <a:bodyPr wrap="none">
+            <a:spAutoFit/>
+          </a:bodyPr>
+          <a:lstStyle/>
+          <a:p>
+            <a:pPr algn="r"/>
+            <a:r>
+              <a:rPr sz="1000" b="1">
+                <a:solidFill>
+                  <a:srgbClr val="6E6A8A"/>
+                </a:solidFill>
+                <a:latin typeface="Microsoft YaHei"/>
+              </a:rPr>
+              <a:t>09</a:t>
+            </a:r>
+          </a:p>
+        </p:txBody>
+      </p:sp>
+      <p:sp>
+        <p:nvSpPr>
+          <p:cNvPr id="6" name="TextBox 5"/>
+          <p:cNvSpPr txBox="1"/>
+          <p:nvPr/>
+        </p:nvSpPr>
+        <p:spPr>
+          <a:xfrm>
+            <a:off x="1828800" y="502920"/>
+            <a:ext cx="9966960" cy="777240"/>
           </a:xfrm>
           <a:prstGeom prst="rect">
             <a:avLst/>
@@ -8939,6 +9607,85 @@
           <a:p>
             <a:pPr algn="l"/>
             <a:r>
+              <a:rPr sz="2800" b="1" i="0">
+                <a:solidFill>
+                  <a:srgbClr val="5B3DF5"/>
+                </a:solidFill>
+                <a:latin typeface="Microsoft YaHei"/>
+              </a:rPr>
+              <a:t/>
+            </a:r>
+          </a:p>
+        </p:txBody>
+      </p:sp>
+      <p:sp>
+        <p:nvSpPr>
+          <p:cNvPr id="7" name="Rectangle 6"/>
+          <p:cNvSpPr/>
+          <p:nvPr/>
+        </p:nvSpPr>
+        <p:spPr>
+          <a:xfrm>
+            <a:off x="1856231" y="1335024"/>
+            <a:ext cx="1234440" cy="82296"/>
+          </a:xfrm>
+          <a:prstGeom prst="rect">
+            <a:avLst/>
+          </a:prstGeom>
+          <a:solidFill>
+            <a:srgbClr val="5B3DF5"/>
+          </a:solidFill>
+          <a:ln>
+            <a:noFill/>
+          </a:ln>
+          <a:effectLst/>
+        </p:spPr>
+        <p:style>
+          <a:lnRef idx="1">
+            <a:schemeClr val="accent1"/>
+          </a:lnRef>
+          <a:fillRef idx="3">
+            <a:schemeClr val="accent1"/>
+          </a:fillRef>
+          <a:effectRef idx="2">
+            <a:schemeClr val="accent1"/>
+          </a:effectRef>
+          <a:fontRef idx="minor">
+            <a:schemeClr val="lt1"/>
+          </a:fontRef>
+        </p:style>
+        <p:txBody>
+          <a:bodyPr rtlCol="0" anchor="ctr"/>
+          <a:lstStyle/>
+          <a:p>
+            <a:pPr algn="ctr"/>
+          </a:p>
+        </p:txBody>
+      </p:sp>
+      <p:sp>
+        <p:nvSpPr>
+          <p:cNvPr id="8" name="TextBox 7"/>
+          <p:cNvSpPr txBox="1"/>
+          <p:nvPr/>
+        </p:nvSpPr>
+        <p:spPr>
+          <a:xfrm>
+            <a:off x="1828800" y="1691640"/>
+            <a:ext cx="2926080" cy="457200"/>
+          </a:xfrm>
+          <a:prstGeom prst="rect">
+            <a:avLst/>
+          </a:prstGeom>
+          <a:noFill/>
+        </p:spPr>
+        <p:txBody>
+          <a:bodyPr wrap="square" lIns="18288" rIns="18288" tIns="9144" bIns="9144" anchor="ctr">
+            <a:spAutoFit/>
+          </a:bodyPr>
+          <a:lstStyle/>
+          <a:p>
+            <a:pPr algn="l"/>
+            <a:r>
               <a:rPr sz="1400" b="1" i="0">
                 <a:solidFill>
                   <a:srgbClr val="5B3DF5"/>
@@ -8952,14 +9699,14 @@
       </p:sp>
       <p:sp>
         <p:nvSpPr>
-          <p:cNvPr id="8" name="TextBox 7"/>
-          <p:cNvSpPr txBox="1"/>
-          <p:nvPr/>
-        </p:nvSpPr>
-        <p:spPr>
-          <a:xfrm>
-            <a:off x="594360" y="2194560"/>
-            <a:ext cx="10972800" cy="731520"/>
+          <p:cNvPr id="9" name="TextBox 8"/>
+          <p:cNvSpPr txBox="1"/>
+          <p:nvPr/>
+        </p:nvSpPr>
+        <p:spPr>
+          <a:xfrm>
+            <a:off x="1828800" y="2286000"/>
+            <a:ext cx="4572000" cy="1005840"/>
           </a:xfrm>
           <a:prstGeom prst="rect">
             <a:avLst/>
@@ -8974,7 +9721,7 @@
           <a:p>
             <a:pPr algn="l"/>
             <a:r>
-              <a:rPr sz="1800" b="1" i="0">
+              <a:rPr sz="1600" b="0" i="0">
                 <a:solidFill>
                   <a:srgbClr val="1B1830"/>
                 </a:solidFill>
@@ -8987,14 +9734,14 @@
       </p:sp>
       <p:sp>
         <p:nvSpPr>
-          <p:cNvPr id="9" name="TextBox 8"/>
-          <p:cNvSpPr txBox="1"/>
-          <p:nvPr/>
-        </p:nvSpPr>
-        <p:spPr>
-          <a:xfrm>
-            <a:off x="594360" y="3108960"/>
-            <a:ext cx="10972800" cy="594360"/>
+          <p:cNvPr id="10" name="TextBox 9"/>
+          <p:cNvSpPr txBox="1"/>
+          <p:nvPr/>
+        </p:nvSpPr>
+        <p:spPr>
+          <a:xfrm>
+            <a:off x="7132320" y="2286000"/>
+            <a:ext cx="4572000" cy="1005840"/>
           </a:xfrm>
           <a:prstGeom prst="rect">
             <a:avLst/>
@@ -9022,14 +9769,14 @@
       </p:sp>
       <p:sp>
         <p:nvSpPr>
-          <p:cNvPr id="10" name="TextBox 9"/>
-          <p:cNvSpPr txBox="1"/>
-          <p:nvPr/>
-        </p:nvSpPr>
-        <p:spPr>
-          <a:xfrm>
-            <a:off x="594360" y="3822191"/>
-            <a:ext cx="10972800" cy="594360"/>
+          <p:cNvPr id="11" name="TextBox 10"/>
+          <p:cNvSpPr txBox="1"/>
+          <p:nvPr/>
+        </p:nvSpPr>
+        <p:spPr>
+          <a:xfrm>
+            <a:off x="1828800" y="3749039"/>
+            <a:ext cx="4572000" cy="1005840"/>
           </a:xfrm>
           <a:prstGeom prst="rect">
             <a:avLst/>
@@ -9057,14 +9804,14 @@
       </p:sp>
       <p:sp>
         <p:nvSpPr>
-          <p:cNvPr id="11" name="TextBox 10"/>
-          <p:cNvSpPr txBox="1"/>
-          <p:nvPr/>
-        </p:nvSpPr>
-        <p:spPr>
-          <a:xfrm>
-            <a:off x="594360" y="4535424"/>
-            <a:ext cx="10972800" cy="594360"/>
+          <p:cNvPr id="12" name="TextBox 11"/>
+          <p:cNvSpPr txBox="1"/>
+          <p:nvPr/>
+        </p:nvSpPr>
+        <p:spPr>
+          <a:xfrm>
+            <a:off x="7132320" y="3749039"/>
+            <a:ext cx="4572000" cy="1005840"/>
           </a:xfrm>
           <a:prstGeom prst="rect">
             <a:avLst/>
@@ -9092,14 +9839,49 @@
       </p:sp>
       <p:sp>
         <p:nvSpPr>
-          <p:cNvPr id="12" name="TextBox 11"/>
-          <p:cNvSpPr txBox="1"/>
-          <p:nvPr/>
-        </p:nvSpPr>
-        <p:spPr>
-          <a:xfrm>
-            <a:off x="594360" y="5248656"/>
-            <a:ext cx="10972800" cy="594360"/>
+          <p:cNvPr id="13" name="TextBox 12"/>
+          <p:cNvSpPr txBox="1"/>
+          <p:nvPr/>
+        </p:nvSpPr>
+        <p:spPr>
+          <a:xfrm>
+            <a:off x="1828800" y="5212080"/>
+            <a:ext cx="4572000" cy="1005840"/>
+          </a:xfrm>
+          <a:prstGeom prst="rect">
+            <a:avLst/>
+          </a:prstGeom>
+          <a:noFill/>
+        </p:spPr>
+        <p:txBody>
+          <a:bodyPr wrap="square" lIns="18288" rIns="18288" tIns="9144" bIns="9144" anchor="ctr">
+            <a:spAutoFit/>
+          </a:bodyPr>
+          <a:lstStyle/>
+          <a:p>
+            <a:pPr algn="l"/>
+            <a:r>
+              <a:rPr sz="1600" b="0" i="0">
+                <a:solidFill>
+                  <a:srgbClr val="1B1830"/>
+                </a:solidFill>
+                <a:latin typeface="Microsoft YaHei"/>
+              </a:rPr>
+              <a:t/>
+            </a:r>
+          </a:p>
+        </p:txBody>
+      </p:sp>
+      <p:sp>
+        <p:nvSpPr>
+          <p:cNvPr id="14" name="TextBox 13"/>
+          <p:cNvSpPr txBox="1"/>
+          <p:nvPr/>
+        </p:nvSpPr>
+        <p:spPr>
+          <a:xfrm>
+            <a:off x="7132320" y="5212080"/>
+            <a:ext cx="4572000" cy="1005840"/>
           </a:xfrm>
           <a:prstGeom prst="rect">
             <a:avLst/>
